--- a/presentations/Sur - Technical Team Presentation.pptx
+++ b/presentations/Sur - Technical Team Presentation.pptx
@@ -9064,7 +9064,7 @@
                           <a:ea typeface="Calibri" pitchFamily="34" charset="-122"/>
                           <a:cs typeface="Calibri" pitchFamily="34" charset="-120"/>
                         </a:rPr>
-                        <a:t>۵۰٪ ریوارد → ValidatorsTreasury؛ ۵۰٪ باقی + ۱۰۰٪ فی → بین ولیدیتورها به نسبت بلاک</a:t>
+                        <a:t>۵۰٪ ریوارد × ۸۵٪ → ValidatorsTreasury؛ ۵۰٪ ریوارد × ۱۵٪ → FoundationDAO؛ ۵۰٪ باقی + ۱۰۰٪ فی → بین ولیدیتورها به نسبت بلاک</a:t>
                       </a:r>
                       <a:endParaRPr lang="en-US" sz="1200" dirty="0">
                         <a:latin typeface="Calibri" charset="0"/>
@@ -27745,7 +27745,7 @@
                 <a:ea typeface="Calibri" pitchFamily="34" charset="-122"/>
                 <a:cs typeface="Calibri" pitchFamily="34" charset="-120"/>
               </a:rPr>
-              <a:t>کاملاً ایزوله — هیچ قرارداد دیگری را نمی‌شناسد</a:t>
+              <a:t>ایزوله از کنترل خروجی — فقط یک ورودی خودکار می‌شناسد</a:t>
             </a:r>
             <a:endParaRPr lang="en-US" sz="1500" dirty="0"/>
           </a:p>
@@ -27784,7 +27784,7 @@
                 <a:ea typeface="Calibri" pitchFamily="34" charset="-122"/>
                 <a:cs typeface="Calibri" pitchFamily="34" charset="-120"/>
               </a:rPr>
-              <a:t>proposeRequestTreasuryBudget کاملاً حذف شد؛ تنها اتصال بیرونی، چرخش identityOracle از طریق proposeExecute است.</a:t>
+              <a:t>proposeRequestTreasuryBudget (بودجه‌ی کمپین) کاملاً حذف شد. اتصال بیرونی: چرخش identityOracle (خروجی، proposeExecute) + دریافت خودکار ۱۵٪ سهم ریوارد از BlockRewardDistributor (ورودی، بدون فراخوانی بنیاد).</a:t>
             </a:r>
             <a:endParaRPr lang="en-US" sz="1180" dirty="0"/>
           </a:p>

--- a/presentations/Sur - Technical Team Presentation.pptx
+++ b/presentations/Sur - Technical Team Presentation.pptx
@@ -3831,6 +3831,10 @@
           </a:solidFill>
           <a:ln/>
         </p:spPr>
+        <p:txBody>
+          <a:bodyPr/>
+          <a:p/>
+        </p:txBody>
       </p:sp>
       <p:sp>
         <p:nvSpPr>
@@ -3851,6 +3855,10 @@
           </a:solidFill>
           <a:ln/>
         </p:spPr>
+        <p:txBody>
+          <a:bodyPr/>
+          <a:p/>
+        </p:txBody>
       </p:sp>
       <p:sp>
         <p:nvSpPr>
@@ -3871,6 +3879,10 @@
           </a:solidFill>
           <a:ln/>
         </p:spPr>
+        <p:txBody>
+          <a:bodyPr/>
+          <a:p/>
+        </p:txBody>
       </p:sp>
       <p:sp>
         <p:nvSpPr>
@@ -3891,6 +3903,10 @@
           </a:solidFill>
           <a:ln/>
         </p:spPr>
+        <p:txBody>
+          <a:bodyPr/>
+          <a:p/>
+        </p:txBody>
       </p:sp>
       <p:sp>
         <p:nvSpPr>
@@ -3911,6 +3927,10 @@
           </a:solidFill>
           <a:ln/>
         </p:spPr>
+        <p:txBody>
+          <a:bodyPr/>
+          <a:p/>
+        </p:txBody>
       </p:sp>
       <p:sp>
         <p:nvSpPr>
@@ -3931,6 +3951,10 @@
           </a:solidFill>
           <a:ln/>
         </p:spPr>
+        <p:txBody>
+          <a:bodyPr/>
+          <a:p/>
+        </p:txBody>
       </p:sp>
       <p:pic>
         <p:nvPicPr>
@@ -4202,6 +4226,10 @@
           </a:solidFill>
           <a:ln/>
         </p:spPr>
+        <p:txBody>
+          <a:bodyPr/>
+          <a:p/>
+        </p:txBody>
       </p:sp>
       <p:pic>
         <p:nvPicPr>
@@ -4299,7 +4327,7 @@
                 <a:ea typeface="Calibri" pitchFamily="34" charset="-122"/>
                 <a:cs typeface="Calibri" pitchFamily="34" charset="-120"/>
               </a:rPr>
-              <a:t>entryThresholdBase × growthFactorPerValidator^n — exponentiation-by-squaring، ۱۸ رقم دقت؛ دوبرابر هر ۱۶ ولیدیتور فعال.</a:t>
+              <a:t>entryThresholdBase × growthFactorPerValidator^paidValidatorCount — exponentiation-by-squaring، ۱۸ رقم دقت؛ پایه ۵۰۰,۰۰۰ سورن، دوبرابر هر ۴۰ ولیدیتور پرداخت‌کننده (نه ۷ مؤسس رایگان genesis-seeded).</a:t>
             </a:r>
             <a:endParaRPr lang="en-US" sz="1180" dirty="0"/>
           </a:p>
@@ -4327,6 +4355,10 @@
             <a:prstDash val="solid"/>
           </a:ln>
         </p:spPr>
+        <p:txBody>
+          <a:bodyPr/>
+          <a:p/>
+        </p:txBody>
       </p:sp>
       <p:sp>
         <p:nvSpPr>
@@ -4347,6 +4379,10 @@
           </a:solidFill>
           <a:ln/>
         </p:spPr>
+        <p:txBody>
+          <a:bodyPr/>
+          <a:p/>
+        </p:txBody>
       </p:sp>
       <p:pic>
         <p:nvPicPr>
@@ -4472,6 +4508,10 @@
             <a:prstDash val="solid"/>
           </a:ln>
         </p:spPr>
+        <p:txBody>
+          <a:bodyPr/>
+          <a:p/>
+        </p:txBody>
       </p:sp>
       <p:sp>
         <p:nvSpPr>
@@ -4492,6 +4532,10 @@
           </a:solidFill>
           <a:ln/>
         </p:spPr>
+        <p:txBody>
+          <a:bodyPr/>
+          <a:p/>
+        </p:txBody>
       </p:sp>
       <p:pic>
         <p:nvPicPr>
@@ -4614,6 +4658,10 @@
           </a:solidFill>
           <a:ln/>
         </p:spPr>
+        <p:txBody>
+          <a:bodyPr/>
+          <a:p/>
+        </p:txBody>
       </p:sp>
       <p:pic>
         <p:nvPicPr>
@@ -4846,6 +4894,10 @@
           </a:solidFill>
           <a:ln/>
         </p:spPr>
+        <p:txBody>
+          <a:bodyPr/>
+          <a:p/>
+        </p:txBody>
       </p:sp>
       <p:pic>
         <p:nvPicPr>
@@ -4890,6 +4942,10 @@
           </a:solidFill>
           <a:ln/>
         </p:spPr>
+        <p:txBody>
+          <a:bodyPr/>
+          <a:p/>
+        </p:txBody>
       </p:sp>
       <p:sp>
         <p:nvSpPr>
@@ -5030,6 +5086,10 @@
             <a:prstDash val="solid"/>
           </a:ln>
         </p:spPr>
+        <p:txBody>
+          <a:bodyPr/>
+          <a:p/>
+        </p:txBody>
       </p:sp>
       <p:sp>
         <p:nvSpPr>
@@ -5050,6 +5110,10 @@
           </a:solidFill>
           <a:ln/>
         </p:spPr>
+        <p:txBody>
+          <a:bodyPr/>
+          <a:p/>
+        </p:txBody>
       </p:sp>
       <p:pic>
         <p:nvPicPr>
@@ -5094,6 +5158,10 @@
           </a:solidFill>
           <a:ln/>
         </p:spPr>
+        <p:txBody>
+          <a:bodyPr/>
+          <a:p/>
+        </p:txBody>
       </p:sp>
       <p:sp>
         <p:nvSpPr>
@@ -5234,6 +5302,10 @@
             <a:prstDash val="solid"/>
           </a:ln>
         </p:spPr>
+        <p:txBody>
+          <a:bodyPr/>
+          <a:p/>
+        </p:txBody>
       </p:sp>
       <p:sp>
         <p:nvSpPr>
@@ -5254,6 +5326,10 @@
           </a:solidFill>
           <a:ln/>
         </p:spPr>
+        <p:txBody>
+          <a:bodyPr/>
+          <a:p/>
+        </p:txBody>
       </p:sp>
       <p:pic>
         <p:nvPicPr>
@@ -5298,6 +5374,10 @@
           </a:solidFill>
           <a:ln/>
         </p:spPr>
+        <p:txBody>
+          <a:bodyPr/>
+          <a:p/>
+        </p:txBody>
       </p:sp>
       <p:sp>
         <p:nvSpPr>
@@ -5438,6 +5518,10 @@
             <a:prstDash val="solid"/>
           </a:ln>
         </p:spPr>
+        <p:txBody>
+          <a:bodyPr/>
+          <a:p/>
+        </p:txBody>
       </p:sp>
       <p:sp>
         <p:nvSpPr>
@@ -5458,6 +5542,10 @@
           </a:solidFill>
           <a:ln/>
         </p:spPr>
+        <p:txBody>
+          <a:bodyPr/>
+          <a:p/>
+        </p:txBody>
       </p:sp>
       <p:pic>
         <p:nvPicPr>
@@ -5502,6 +5590,10 @@
           </a:solidFill>
           <a:ln/>
         </p:spPr>
+        <p:txBody>
+          <a:bodyPr/>
+          <a:p/>
+        </p:txBody>
       </p:sp>
       <p:sp>
         <p:nvSpPr>
@@ -5639,6 +5731,10 @@
           </a:solidFill>
           <a:ln/>
         </p:spPr>
+        <p:txBody>
+          <a:bodyPr/>
+          <a:p/>
+        </p:txBody>
       </p:sp>
       <p:pic>
         <p:nvPicPr>
@@ -6867,6 +6963,10 @@
           </a:solidFill>
           <a:ln/>
         </p:spPr>
+        <p:txBody>
+          <a:bodyPr/>
+          <a:p/>
+        </p:txBody>
       </p:sp>
       <p:pic>
         <p:nvPicPr>
@@ -7099,6 +7199,10 @@
           </a:solidFill>
           <a:ln/>
         </p:spPr>
+        <p:txBody>
+          <a:bodyPr/>
+          <a:p/>
+        </p:txBody>
       </p:sp>
       <p:pic>
         <p:nvPicPr>
@@ -7224,6 +7328,10 @@
             <a:prstDash val="solid"/>
           </a:ln>
         </p:spPr>
+        <p:txBody>
+          <a:bodyPr/>
+          <a:p/>
+        </p:txBody>
       </p:sp>
       <p:sp>
         <p:nvSpPr>
@@ -7244,6 +7352,10 @@
           </a:solidFill>
           <a:ln/>
         </p:spPr>
+        <p:txBody>
+          <a:bodyPr/>
+          <a:p/>
+        </p:txBody>
       </p:sp>
       <p:pic>
         <p:nvPicPr>
@@ -7369,6 +7481,10 @@
             <a:prstDash val="solid"/>
           </a:ln>
         </p:spPr>
+        <p:txBody>
+          <a:bodyPr/>
+          <a:p/>
+        </p:txBody>
       </p:sp>
       <p:sp>
         <p:nvSpPr>
@@ -7389,6 +7505,10 @@
           </a:solidFill>
           <a:ln/>
         </p:spPr>
+        <p:txBody>
+          <a:bodyPr/>
+          <a:p/>
+        </p:txBody>
       </p:sp>
       <p:pic>
         <p:nvPicPr>
@@ -7511,6 +7631,10 @@
           </a:solidFill>
           <a:ln/>
         </p:spPr>
+        <p:txBody>
+          <a:bodyPr/>
+          <a:p/>
+        </p:txBody>
       </p:sp>
       <p:pic>
         <p:nvPicPr>
@@ -8325,6 +8449,10 @@
           </a:solidFill>
           <a:ln/>
         </p:spPr>
+        <p:txBody>
+          <a:bodyPr/>
+          <a:p/>
+        </p:txBody>
       </p:sp>
       <p:pic>
         <p:nvPicPr>
@@ -9277,6 +9405,10 @@
           </a:solidFill>
           <a:ln/>
         </p:spPr>
+        <p:txBody>
+          <a:bodyPr/>
+          <a:p/>
+        </p:txBody>
       </p:sp>
       <p:pic>
         <p:nvPicPr>
@@ -10505,6 +10637,10 @@
           </a:solidFill>
           <a:ln/>
         </p:spPr>
+        <p:txBody>
+          <a:bodyPr/>
+          <a:p/>
+        </p:txBody>
       </p:sp>
       <p:pic>
         <p:nvPicPr>
@@ -10737,6 +10873,10 @@
           </a:solidFill>
           <a:ln/>
         </p:spPr>
+        <p:txBody>
+          <a:bodyPr/>
+          <a:p/>
+        </p:txBody>
       </p:sp>
       <p:pic>
         <p:nvPicPr>
@@ -10862,6 +11002,10 @@
             <a:prstDash val="solid"/>
           </a:ln>
         </p:spPr>
+        <p:txBody>
+          <a:bodyPr/>
+          <a:p/>
+        </p:txBody>
       </p:sp>
       <p:sp>
         <p:nvSpPr>
@@ -10882,6 +11026,10 @@
           </a:solidFill>
           <a:ln/>
         </p:spPr>
+        <p:txBody>
+          <a:bodyPr/>
+          <a:p/>
+        </p:txBody>
       </p:sp>
       <p:pic>
         <p:nvPicPr>
@@ -11007,6 +11155,10 @@
             <a:prstDash val="solid"/>
           </a:ln>
         </p:spPr>
+        <p:txBody>
+          <a:bodyPr/>
+          <a:p/>
+        </p:txBody>
       </p:sp>
       <p:sp>
         <p:nvSpPr>
@@ -11027,6 +11179,10 @@
           </a:solidFill>
           <a:ln/>
         </p:spPr>
+        <p:txBody>
+          <a:bodyPr/>
+          <a:p/>
+        </p:txBody>
       </p:sp>
       <p:pic>
         <p:nvPicPr>
@@ -11149,6 +11305,10 @@
           </a:solidFill>
           <a:ln/>
         </p:spPr>
+        <p:txBody>
+          <a:bodyPr/>
+          <a:p/>
+        </p:txBody>
       </p:sp>
       <p:pic>
         <p:nvPicPr>
@@ -12239,6 +12399,10 @@
           </a:solidFill>
           <a:ln/>
         </p:spPr>
+        <p:txBody>
+          <a:bodyPr/>
+          <a:p/>
+        </p:txBody>
       </p:sp>
       <p:pic>
         <p:nvPicPr>
@@ -12432,6 +12596,10 @@
           </a:solidFill>
           <a:ln/>
         </p:spPr>
+        <p:txBody>
+          <a:bodyPr/>
+          <a:p/>
+        </p:txBody>
       </p:sp>
       <p:sp>
         <p:nvSpPr>
@@ -12491,6 +12659,10 @@
           </a:solidFill>
           <a:ln/>
         </p:spPr>
+        <p:txBody>
+          <a:bodyPr/>
+          <a:p/>
+        </p:txBody>
       </p:sp>
       <p:pic>
         <p:nvPicPr>
@@ -12865,6 +13037,10 @@
           </a:solidFill>
           <a:ln/>
         </p:spPr>
+        <p:txBody>
+          <a:bodyPr/>
+          <a:p/>
+        </p:txBody>
       </p:sp>
       <p:pic>
         <p:nvPicPr>
@@ -14499,6 +14675,10 @@
           </a:solidFill>
           <a:ln/>
         </p:spPr>
+        <p:txBody>
+          <a:bodyPr/>
+          <a:p/>
+        </p:txBody>
       </p:sp>
       <p:pic>
         <p:nvPicPr>
@@ -14731,6 +14911,10 @@
           </a:solidFill>
           <a:ln/>
         </p:spPr>
+        <p:txBody>
+          <a:bodyPr/>
+          <a:p/>
+        </p:txBody>
       </p:sp>
       <p:pic>
         <p:nvPicPr>
@@ -14856,6 +15040,10 @@
             <a:prstDash val="solid"/>
           </a:ln>
         </p:spPr>
+        <p:txBody>
+          <a:bodyPr/>
+          <a:p/>
+        </p:txBody>
       </p:sp>
       <p:sp>
         <p:nvSpPr>
@@ -14876,6 +15064,10 @@
           </a:solidFill>
           <a:ln/>
         </p:spPr>
+        <p:txBody>
+          <a:bodyPr/>
+          <a:p/>
+        </p:txBody>
       </p:sp>
       <p:pic>
         <p:nvPicPr>
@@ -15001,6 +15193,10 @@
             <a:prstDash val="solid"/>
           </a:ln>
         </p:spPr>
+        <p:txBody>
+          <a:bodyPr/>
+          <a:p/>
+        </p:txBody>
       </p:sp>
       <p:sp>
         <p:nvSpPr>
@@ -15021,6 +15217,10 @@
           </a:solidFill>
           <a:ln/>
         </p:spPr>
+        <p:txBody>
+          <a:bodyPr/>
+          <a:p/>
+        </p:txBody>
       </p:sp>
       <p:pic>
         <p:nvPicPr>
@@ -15143,6 +15343,10 @@
           </a:solidFill>
           <a:ln/>
         </p:spPr>
+        <p:txBody>
+          <a:bodyPr/>
+          <a:p/>
+        </p:txBody>
       </p:sp>
       <p:pic>
         <p:nvPicPr>
@@ -15336,6 +15540,10 @@
           </a:solidFill>
           <a:ln/>
         </p:spPr>
+        <p:txBody>
+          <a:bodyPr/>
+          <a:p/>
+        </p:txBody>
       </p:sp>
       <p:sp>
         <p:nvSpPr>
@@ -15395,6 +15603,10 @@
           </a:solidFill>
           <a:ln/>
         </p:spPr>
+        <p:txBody>
+          <a:bodyPr/>
+          <a:p/>
+        </p:txBody>
       </p:sp>
       <p:pic>
         <p:nvPicPr>
@@ -16688,6 +16900,10 @@
           </a:solidFill>
           <a:ln/>
         </p:spPr>
+        <p:txBody>
+          <a:bodyPr/>
+          <a:p/>
+        </p:txBody>
       </p:sp>
       <p:pic>
         <p:nvPicPr>
@@ -16920,6 +17136,10 @@
           </a:solidFill>
           <a:ln/>
         </p:spPr>
+        <p:txBody>
+          <a:bodyPr/>
+          <a:p/>
+        </p:txBody>
       </p:sp>
       <p:pic>
         <p:nvPicPr>
@@ -16964,6 +17184,10 @@
           </a:solidFill>
           <a:ln/>
         </p:spPr>
+        <p:txBody>
+          <a:bodyPr/>
+          <a:p/>
+        </p:txBody>
       </p:sp>
       <p:sp>
         <p:nvSpPr>
@@ -17104,6 +17328,10 @@
             <a:prstDash val="solid"/>
           </a:ln>
         </p:spPr>
+        <p:txBody>
+          <a:bodyPr/>
+          <a:p/>
+        </p:txBody>
       </p:sp>
       <p:sp>
         <p:nvSpPr>
@@ -17124,6 +17352,10 @@
           </a:solidFill>
           <a:ln/>
         </p:spPr>
+        <p:txBody>
+          <a:bodyPr/>
+          <a:p/>
+        </p:txBody>
       </p:sp>
       <p:pic>
         <p:nvPicPr>
@@ -17168,6 +17400,10 @@
           </a:solidFill>
           <a:ln/>
         </p:spPr>
+        <p:txBody>
+          <a:bodyPr/>
+          <a:p/>
+        </p:txBody>
       </p:sp>
       <p:sp>
         <p:nvSpPr>
@@ -17308,6 +17544,10 @@
             <a:prstDash val="solid"/>
           </a:ln>
         </p:spPr>
+        <p:txBody>
+          <a:bodyPr/>
+          <a:p/>
+        </p:txBody>
       </p:sp>
       <p:sp>
         <p:nvSpPr>
@@ -17328,6 +17568,10 @@
           </a:solidFill>
           <a:ln/>
         </p:spPr>
+        <p:txBody>
+          <a:bodyPr/>
+          <a:p/>
+        </p:txBody>
       </p:sp>
       <p:pic>
         <p:nvPicPr>
@@ -17372,6 +17616,10 @@
           </a:solidFill>
           <a:ln/>
         </p:spPr>
+        <p:txBody>
+          <a:bodyPr/>
+          <a:p/>
+        </p:txBody>
       </p:sp>
       <p:sp>
         <p:nvSpPr>
@@ -17512,6 +17760,10 @@
             <a:prstDash val="solid"/>
           </a:ln>
         </p:spPr>
+        <p:txBody>
+          <a:bodyPr/>
+          <a:p/>
+        </p:txBody>
       </p:sp>
       <p:sp>
         <p:nvSpPr>
@@ -17532,6 +17784,10 @@
           </a:solidFill>
           <a:ln/>
         </p:spPr>
+        <p:txBody>
+          <a:bodyPr/>
+          <a:p/>
+        </p:txBody>
       </p:sp>
       <p:pic>
         <p:nvPicPr>
@@ -17576,6 +17832,10 @@
           </a:solidFill>
           <a:ln/>
         </p:spPr>
+        <p:txBody>
+          <a:bodyPr/>
+          <a:p/>
+        </p:txBody>
       </p:sp>
       <p:sp>
         <p:nvSpPr>
@@ -17713,6 +17973,10 @@
           </a:solidFill>
           <a:ln/>
         </p:spPr>
+        <p:txBody>
+          <a:bodyPr/>
+          <a:p/>
+        </p:txBody>
       </p:sp>
       <p:pic>
         <p:nvPicPr>
@@ -17945,6 +18209,10 @@
           </a:solidFill>
           <a:ln/>
         </p:spPr>
+        <p:txBody>
+          <a:bodyPr/>
+          <a:p/>
+        </p:txBody>
       </p:sp>
       <p:pic>
         <p:nvPicPr>
@@ -18070,6 +18338,10 @@
             <a:prstDash val="solid"/>
           </a:ln>
         </p:spPr>
+        <p:txBody>
+          <a:bodyPr/>
+          <a:p/>
+        </p:txBody>
       </p:sp>
       <p:sp>
         <p:nvSpPr>
@@ -18090,6 +18362,10 @@
           </a:solidFill>
           <a:ln/>
         </p:spPr>
+        <p:txBody>
+          <a:bodyPr/>
+          <a:p/>
+        </p:txBody>
       </p:sp>
       <p:pic>
         <p:nvPicPr>
@@ -18215,6 +18491,10 @@
             <a:prstDash val="solid"/>
           </a:ln>
         </p:spPr>
+        <p:txBody>
+          <a:bodyPr/>
+          <a:p/>
+        </p:txBody>
       </p:sp>
       <p:sp>
         <p:nvSpPr>
@@ -18235,6 +18515,10 @@
           </a:solidFill>
           <a:ln/>
         </p:spPr>
+        <p:txBody>
+          <a:bodyPr/>
+          <a:p/>
+        </p:txBody>
       </p:sp>
       <p:pic>
         <p:nvPicPr>
@@ -18357,6 +18641,10 @@
           </a:solidFill>
           <a:ln/>
         </p:spPr>
+        <p:txBody>
+          <a:bodyPr/>
+          <a:p/>
+        </p:txBody>
       </p:sp>
       <p:pic>
         <p:nvPicPr>
@@ -18589,6 +18877,10 @@
           </a:solidFill>
           <a:ln/>
         </p:spPr>
+        <p:txBody>
+          <a:bodyPr/>
+          <a:p/>
+        </p:txBody>
       </p:sp>
       <p:pic>
         <p:nvPicPr>
@@ -18633,6 +18925,10 @@
           </a:solidFill>
           <a:ln/>
         </p:spPr>
+        <p:txBody>
+          <a:bodyPr/>
+          <a:p/>
+        </p:txBody>
       </p:sp>
       <p:sp>
         <p:nvSpPr>
@@ -18773,6 +19069,10 @@
             <a:prstDash val="solid"/>
           </a:ln>
         </p:spPr>
+        <p:txBody>
+          <a:bodyPr/>
+          <a:p/>
+        </p:txBody>
       </p:sp>
       <p:sp>
         <p:nvSpPr>
@@ -18793,6 +19093,10 @@
           </a:solidFill>
           <a:ln/>
         </p:spPr>
+        <p:txBody>
+          <a:bodyPr/>
+          <a:p/>
+        </p:txBody>
       </p:sp>
       <p:pic>
         <p:nvPicPr>
@@ -18837,6 +19141,10 @@
           </a:solidFill>
           <a:ln/>
         </p:spPr>
+        <p:txBody>
+          <a:bodyPr/>
+          <a:p/>
+        </p:txBody>
       </p:sp>
       <p:sp>
         <p:nvSpPr>
@@ -18977,6 +19285,10 @@
             <a:prstDash val="solid"/>
           </a:ln>
         </p:spPr>
+        <p:txBody>
+          <a:bodyPr/>
+          <a:p/>
+        </p:txBody>
       </p:sp>
       <p:sp>
         <p:nvSpPr>
@@ -18997,6 +19309,10 @@
           </a:solidFill>
           <a:ln/>
         </p:spPr>
+        <p:txBody>
+          <a:bodyPr/>
+          <a:p/>
+        </p:txBody>
       </p:sp>
       <p:pic>
         <p:nvPicPr>
@@ -19041,6 +19357,10 @@
           </a:solidFill>
           <a:ln/>
         </p:spPr>
+        <p:txBody>
+          <a:bodyPr/>
+          <a:p/>
+        </p:txBody>
       </p:sp>
       <p:sp>
         <p:nvSpPr>
@@ -19181,6 +19501,10 @@
             <a:prstDash val="solid"/>
           </a:ln>
         </p:spPr>
+        <p:txBody>
+          <a:bodyPr/>
+          <a:p/>
+        </p:txBody>
       </p:sp>
       <p:sp>
         <p:nvSpPr>
@@ -19201,6 +19525,10 @@
           </a:solidFill>
           <a:ln/>
         </p:spPr>
+        <p:txBody>
+          <a:bodyPr/>
+          <a:p/>
+        </p:txBody>
       </p:sp>
       <p:pic>
         <p:nvPicPr>
@@ -19245,6 +19573,10 @@
           </a:solidFill>
           <a:ln/>
         </p:spPr>
+        <p:txBody>
+          <a:bodyPr/>
+          <a:p/>
+        </p:txBody>
       </p:sp>
       <p:sp>
         <p:nvSpPr>
@@ -19382,6 +19714,10 @@
           </a:solidFill>
           <a:ln/>
         </p:spPr>
+        <p:txBody>
+          <a:bodyPr/>
+          <a:p/>
+        </p:txBody>
       </p:sp>
       <p:pic>
         <p:nvPicPr>
@@ -19614,6 +19950,10 @@
           </a:solidFill>
           <a:ln/>
         </p:spPr>
+        <p:txBody>
+          <a:bodyPr/>
+          <a:p/>
+        </p:txBody>
       </p:sp>
       <p:pic>
         <p:nvPicPr>
@@ -19739,6 +20079,10 @@
             <a:prstDash val="solid"/>
           </a:ln>
         </p:spPr>
+        <p:txBody>
+          <a:bodyPr/>
+          <a:p/>
+        </p:txBody>
       </p:sp>
       <p:sp>
         <p:nvSpPr>
@@ -19759,6 +20103,10 @@
           </a:solidFill>
           <a:ln/>
         </p:spPr>
+        <p:txBody>
+          <a:bodyPr/>
+          <a:p/>
+        </p:txBody>
       </p:sp>
       <p:pic>
         <p:nvPicPr>
@@ -19881,6 +20229,10 @@
           </a:solidFill>
           <a:ln/>
         </p:spPr>
+        <p:txBody>
+          <a:bodyPr/>
+          <a:p/>
+        </p:txBody>
       </p:sp>
       <p:pic>
         <p:nvPicPr>
@@ -20074,6 +20426,10 @@
           </a:solidFill>
           <a:ln/>
         </p:spPr>
+        <p:txBody>
+          <a:bodyPr/>
+          <a:p/>
+        </p:txBody>
       </p:sp>
       <p:sp>
         <p:nvSpPr>
@@ -20133,6 +20489,10 @@
           </a:solidFill>
           <a:ln/>
         </p:spPr>
+        <p:txBody>
+          <a:bodyPr/>
+          <a:p/>
+        </p:txBody>
       </p:sp>
       <p:pic>
         <p:nvPicPr>
@@ -20365,6 +20725,10 @@
           </a:solidFill>
           <a:ln/>
         </p:spPr>
+        <p:txBody>
+          <a:bodyPr/>
+          <a:p/>
+        </p:txBody>
       </p:sp>
       <p:pic>
         <p:nvPicPr>
@@ -20490,6 +20854,10 @@
             <a:prstDash val="solid"/>
           </a:ln>
         </p:spPr>
+        <p:txBody>
+          <a:bodyPr/>
+          <a:p/>
+        </p:txBody>
       </p:sp>
       <p:sp>
         <p:nvSpPr>
@@ -20510,6 +20878,10 @@
           </a:solidFill>
           <a:ln/>
         </p:spPr>
+        <p:txBody>
+          <a:bodyPr/>
+          <a:p/>
+        </p:txBody>
       </p:sp>
       <p:pic>
         <p:nvPicPr>
@@ -20635,6 +21007,10 @@
             <a:prstDash val="solid"/>
           </a:ln>
         </p:spPr>
+        <p:txBody>
+          <a:bodyPr/>
+          <a:p/>
+        </p:txBody>
       </p:sp>
       <p:sp>
         <p:nvSpPr>
@@ -20655,6 +21031,10 @@
           </a:solidFill>
           <a:ln/>
         </p:spPr>
+        <p:txBody>
+          <a:bodyPr/>
+          <a:p/>
+        </p:txBody>
       </p:sp>
       <p:pic>
         <p:nvPicPr>
@@ -20777,6 +21157,10 @@
           </a:solidFill>
           <a:ln/>
         </p:spPr>
+        <p:txBody>
+          <a:bodyPr/>
+          <a:p/>
+        </p:txBody>
       </p:sp>
       <p:pic>
         <p:nvPicPr>
@@ -20970,6 +21354,10 @@
           </a:solidFill>
           <a:ln/>
         </p:spPr>
+        <p:txBody>
+          <a:bodyPr/>
+          <a:p/>
+        </p:txBody>
       </p:sp>
       <p:sp>
         <p:nvSpPr>
@@ -21029,6 +21417,10 @@
           </a:solidFill>
           <a:ln/>
         </p:spPr>
+        <p:txBody>
+          <a:bodyPr/>
+          <a:p/>
+        </p:txBody>
       </p:sp>
       <p:pic>
         <p:nvPicPr>
@@ -21261,6 +21653,10 @@
           </a:solidFill>
           <a:ln/>
         </p:spPr>
+        <p:txBody>
+          <a:bodyPr/>
+          <a:p/>
+        </p:txBody>
       </p:sp>
       <p:pic>
         <p:nvPicPr>
@@ -21386,6 +21782,10 @@
             <a:prstDash val="solid"/>
           </a:ln>
         </p:spPr>
+        <p:txBody>
+          <a:bodyPr/>
+          <a:p/>
+        </p:txBody>
       </p:sp>
       <p:sp>
         <p:nvSpPr>
@@ -21406,6 +21806,10 @@
           </a:solidFill>
           <a:ln/>
         </p:spPr>
+        <p:txBody>
+          <a:bodyPr/>
+          <a:p/>
+        </p:txBody>
       </p:sp>
       <p:pic>
         <p:nvPicPr>
@@ -21528,6 +21932,10 @@
           </a:solidFill>
           <a:ln/>
         </p:spPr>
+        <p:txBody>
+          <a:bodyPr/>
+          <a:p/>
+        </p:txBody>
       </p:sp>
       <p:pic>
         <p:nvPicPr>
@@ -21721,6 +22129,10 @@
           </a:solidFill>
           <a:ln/>
         </p:spPr>
+        <p:txBody>
+          <a:bodyPr/>
+          <a:p/>
+        </p:txBody>
       </p:sp>
       <p:sp>
         <p:nvSpPr>
@@ -21780,6 +22192,10 @@
           </a:solidFill>
           <a:ln/>
         </p:spPr>
+        <p:txBody>
+          <a:bodyPr/>
+          <a:p/>
+        </p:txBody>
       </p:sp>
       <p:pic>
         <p:nvPicPr>
@@ -22014,6 +22430,10 @@
           </a:solidFill>
           <a:ln/>
         </p:spPr>
+        <p:txBody>
+          <a:bodyPr/>
+          <a:p/>
+        </p:txBody>
       </p:sp>
       <p:sp>
         <p:nvSpPr>
@@ -22362,6 +22782,10 @@
           </a:solidFill>
           <a:ln/>
         </p:spPr>
+        <p:txBody>
+          <a:bodyPr/>
+          <a:p/>
+        </p:txBody>
       </p:sp>
       <p:pic>
         <p:nvPicPr>
@@ -23452,6 +23876,10 @@
           </a:solidFill>
           <a:ln/>
         </p:spPr>
+        <p:txBody>
+          <a:bodyPr/>
+          <a:p/>
+        </p:txBody>
       </p:sp>
       <p:pic>
         <p:nvPicPr>
@@ -23606,6 +24034,10 @@
           </a:solidFill>
           <a:ln/>
         </p:spPr>
+        <p:txBody>
+          <a:bodyPr/>
+          <a:p/>
+        </p:txBody>
       </p:sp>
       <p:sp>
         <p:nvSpPr>
@@ -23626,6 +24058,10 @@
           </a:solidFill>
           <a:ln/>
         </p:spPr>
+        <p:txBody>
+          <a:bodyPr/>
+          <a:p/>
+        </p:txBody>
       </p:sp>
       <p:pic>
         <p:nvPicPr>
@@ -25331,6 +25767,10 @@
           </a:solidFill>
           <a:ln/>
         </p:spPr>
+        <p:txBody>
+          <a:bodyPr/>
+          <a:p/>
+        </p:txBody>
       </p:sp>
       <p:pic>
         <p:nvPicPr>
@@ -25563,6 +26003,10 @@
           </a:solidFill>
           <a:ln/>
         </p:spPr>
+        <p:txBody>
+          <a:bodyPr/>
+          <a:p/>
+        </p:txBody>
       </p:sp>
       <p:pic>
         <p:nvPicPr>
@@ -25688,6 +26132,10 @@
             <a:prstDash val="solid"/>
           </a:ln>
         </p:spPr>
+        <p:txBody>
+          <a:bodyPr/>
+          <a:p/>
+        </p:txBody>
       </p:sp>
       <p:sp>
         <p:nvSpPr>
@@ -25708,6 +26156,10 @@
           </a:solidFill>
           <a:ln/>
         </p:spPr>
+        <p:txBody>
+          <a:bodyPr/>
+          <a:p/>
+        </p:txBody>
       </p:sp>
       <p:pic>
         <p:nvPicPr>
@@ -25833,6 +26285,10 @@
             <a:prstDash val="solid"/>
           </a:ln>
         </p:spPr>
+        <p:txBody>
+          <a:bodyPr/>
+          <a:p/>
+        </p:txBody>
       </p:sp>
       <p:sp>
         <p:nvSpPr>
@@ -25853,6 +26309,10 @@
           </a:solidFill>
           <a:ln/>
         </p:spPr>
+        <p:txBody>
+          <a:bodyPr/>
+          <a:p/>
+        </p:txBody>
       </p:sp>
       <p:pic>
         <p:nvPicPr>
@@ -25975,6 +26435,10 @@
           </a:solidFill>
           <a:ln/>
         </p:spPr>
+        <p:txBody>
+          <a:bodyPr/>
+          <a:p/>
+        </p:txBody>
       </p:sp>
       <p:pic>
         <p:nvPicPr>
@@ -26168,6 +26632,10 @@
           </a:solidFill>
           <a:ln/>
         </p:spPr>
+        <p:txBody>
+          <a:bodyPr/>
+          <a:p/>
+        </p:txBody>
       </p:sp>
       <p:sp>
         <p:nvSpPr>
@@ -26227,6 +26695,10 @@
           </a:solidFill>
           <a:ln/>
         </p:spPr>
+        <p:txBody>
+          <a:bodyPr/>
+          <a:p/>
+        </p:txBody>
       </p:sp>
       <p:pic>
         <p:nvPicPr>
@@ -27455,6 +27927,10 @@
           </a:solidFill>
           <a:ln/>
         </p:spPr>
+        <p:txBody>
+          <a:bodyPr/>
+          <a:p/>
+        </p:txBody>
       </p:sp>
       <p:pic>
         <p:nvPicPr>
@@ -27687,6 +28163,10 @@
           </a:solidFill>
           <a:ln/>
         </p:spPr>
+        <p:txBody>
+          <a:bodyPr/>
+          <a:p/>
+        </p:txBody>
       </p:sp>
       <p:pic>
         <p:nvPicPr>
@@ -27784,7 +28264,7 @@
                 <a:ea typeface="Calibri" pitchFamily="34" charset="-122"/>
                 <a:cs typeface="Calibri" pitchFamily="34" charset="-120"/>
               </a:rPr>
-              <a:t>proposeRequestTreasuryBudget (بودجه‌ی کمپین) کاملاً حذف شد. اتصال بیرونی: چرخش identityOracle (خروجی، proposeExecute) + دریافت خودکار ۱۵٪ سهم ریوارد از BlockRewardDistributor (ورودی، بدون فراخوانی بنیاد).</a:t>
+              <a:t>proposeRequestTreasuryBudget (بودجه‌ی کمپین) کاملاً حذف شد. اتصال بیرونی: چرخش identityOracle (خروجی، proposeExecute) + دریافت خودکار ۱۵٪ کل بلاک‌ریوارد از BlockRewardDistributor (ورودی، بدون فراخوانی بنیاد).</a:t>
             </a:r>
             <a:endParaRPr lang="en-US" sz="1180" dirty="0"/>
           </a:p>
@@ -27812,6 +28292,10 @@
             <a:prstDash val="solid"/>
           </a:ln>
         </p:spPr>
+        <p:txBody>
+          <a:bodyPr/>
+          <a:p/>
+        </p:txBody>
       </p:sp>
       <p:sp>
         <p:nvSpPr>
@@ -27832,6 +28316,10 @@
           </a:solidFill>
           <a:ln/>
         </p:spPr>
+        <p:txBody>
+          <a:bodyPr/>
+          <a:p/>
+        </p:txBody>
       </p:sp>
       <p:pic>
         <p:nvPicPr>
@@ -27954,6 +28442,10 @@
           </a:solidFill>
           <a:ln/>
         </p:spPr>
+        <p:txBody>
+          <a:bodyPr/>
+          <a:p/>
+        </p:txBody>
       </p:sp>
       <p:pic>
         <p:nvPicPr>
@@ -29320,6 +29812,10 @@
           </a:solidFill>
           <a:ln/>
         </p:spPr>
+        <p:txBody>
+          <a:bodyPr/>
+          <a:p/>
+        </p:txBody>
       </p:sp>
       <p:pic>
         <p:nvPicPr>

--- a/presentations/Sur - Technical Team Presentation.pptx
+++ b/presentations/Sur - Technical Team Presentation.pptx
@@ -4480,7 +4480,7 @@
                 <a:ea typeface="Calibri" pitchFamily="34" charset="-122"/>
                 <a:cs typeface="Calibri" pitchFamily="34" charset="-120"/>
               </a:rPr>
-              <a:t>isLive=true فلگ‌ها را آپدیت می‌کند؛ isLive=false فقط event می‌زند — تشخیص غیرفعالی صرفاً بر پایه‌ی غیبت گزارش مثبت است.</a:t>
+              <a:t>هر دو حالت (مثبت/منفی) توی مخرج نسبت شمرده می‌شن؛ فعال‌سازی نیازمند نسبت موفقیت ۹۵٪+، حداقل تعداد بررسی کافی، و تازگی آخرین گزارش مثبته — نه فقط شمارش خام.</a:t>
             </a:r>
             <a:endParaRPr lang="en-US" sz="1180" dirty="0"/>
           </a:p>
@@ -5274,7 +5274,7 @@
                 <a:ea typeface="Calibri" pitchFamily="34" charset="-122"/>
                 <a:cs typeface="Calibri" pitchFamily="34" charset="-120"/>
               </a:rPr>
-              <a:t>promoteAfterProbation بعد از minLivenessConfirmationsToActivate</a:t>
+              <a:t>promoteAfterProbation بعد از نسبت موفقیت ۹۵٪+ با حداقل تعداد بررسی کافی</a:t>
             </a:r>
             <a:endParaRPr lang="en-US" sz="1050" dirty="0"/>
           </a:p>
@@ -5706,7 +5706,7 @@
                 <a:ea typeface="Calibri" pitchFamily="34" charset="-122"/>
                 <a:cs typeface="Calibri" pitchFamily="34" charset="-120"/>
               </a:rPr>
-              <a:t>promoteAfterRecovery ظرف recoveryPeriod؛ وگرنه withdrawStake بعد از exitCooldown با کسر slashBps</a:t>
+              <a:t>promoteAfterRecovery حداقل recoveryPeriod بعد (نه ضرب‌الاجل)، با نسبت ۹۵٪+؛ جریمه‌ی slashBps مستقل و در لحظه‌ی دموت تعیین‌تکلیف می‌شود، نه در خروج</a:t>
             </a:r>
             <a:endParaRPr lang="en-US" sz="1050" dirty="0"/>
           </a:p>
@@ -9192,7 +9192,7 @@
                           <a:ea typeface="Calibri" pitchFamily="34" charset="-122"/>
                           <a:cs typeface="Calibri" pitchFamily="34" charset="-120"/>
                         </a:rPr>
-                        <a:t>۵۰٪ ریوارد × ۸۵٪ → ValidatorsTreasury؛ ۵۰٪ ریوارد × ۱۵٪ → FoundationDAO؛ ۵۰٪ باقی + ۱۰۰٪ فی → بین ولیدیتورها به نسبت بلاک</a:t>
+                        <a:t>۱۵٪ کل ریوارد → FoundationDAO (ثابت)؛ ۵۰٪ پیش‌فرض کل ریوارد (حکمرانی‌شونده ۴۰-۶۵٪) → مستقیم ولیدیتورها؛ باقی‌مانده → ValidatorsTreasury؛ از فی معمولی ۳۰٪ سوزانده، ۷۰٪+۱۰۰٪ کارمزد عضویت → ولیدیتورها به نسبت بلاک</a:t>
                       </a:r>
                       <a:endParaRPr lang="en-US" sz="1200" dirty="0">
                         <a:latin typeface="Calibri" charset="0"/>
@@ -21754,7 +21754,7 @@
                 <a:ea typeface="Calibri" pitchFamily="34" charset="-122"/>
                 <a:cs typeface="Calibri" pitchFamily="34" charset="-120"/>
               </a:rPr>
-              <a:t>دیپلوی هر شش قرارداد روی زنجیره‌ی موقت (Anvil/Hardhat)، استخراج code+storage، نوشتن در alloc.</a:t>
+              <a:t>برای ۳ قرارداد (FoundationDAO, ValidatorsRegistry, ValidatorsBoard): دیپلوی روی زنجیره‌ی موقت (Anvil/Hardhat)، استخراج storage. برای ۳ قرارداد دیگر (BlockRewardDistributor, ValidatorsTreasury, IdentityRegistry): نوشتن مستقیم اسکالرها در alloc، بدون شبیه‌سازی.</a:t>
             </a:r>
             <a:endParaRPr lang="en-US" sz="1180" dirty="0"/>
           </a:p>
@@ -26104,7 +26104,7 @@
                 <a:ea typeface="Calibri" pitchFamily="34" charset="-122"/>
                 <a:cs typeface="Calibri" pitchFamily="34" charset="-120"/>
               </a:rPr>
-              <a:t>روی یک زنجیره‌ی موقت شبیه‌سازی می‌شود؛ فقط code و storage نهایی در alloc بلاک genesis تزریق می‌شود.</a:t>
+              <a:t>برای ۳ قرارداد با mapping/آرایه‌ی پیچیده (FoundationDAO, ValidatorsRegistry, ValidatorsBoard) روی یک زنجیره‌ی موقت شبیه‌سازی می‌شود؛ ۳ قرارداد دیگر (BlockRewardDistributor, ValidatorsTreasury, IdentityRegistry) با نوشتن مستقیم مقادیر اسکالر در alloc، بدون شبیه‌سازی. در هردو حالت فقط code و storage نهایی در alloc بلاک genesis تزریق می‌شود.</a:t>
             </a:r>
             <a:endParaRPr lang="en-US" sz="1180" dirty="0"/>
           </a:p>
@@ -26410,7 +26410,7 @@
                 <a:ea typeface="Calibri" pitchFamily="34" charset="-122"/>
                 <a:cs typeface="Calibri" pitchFamily="34" charset="-120"/>
               </a:rPr>
-              <a:t>باید به‌عنوان آرگومان (_genesisTimestamp) پاس داده شود.</a:t>
+              <a:t>باید مستقیم داخل سورس constructor فایل کمکی هاردکد شود (نه به‌عنوان آرگومان — این فایل‌ها بدون آرگومان دیپلوی می‌شوند).</a:t>
             </a:r>
             <a:endParaRPr lang="en-US" sz="1180" dirty="0"/>
           </a:p>

--- a/presentations/Sur - Technical Team Presentation.pptx
+++ b/presentations/Sur - Technical Team Presentation.pptx
@@ -4441,7 +4441,7 @@
                 <a:ea typeface="Calibri" pitchFamily="34" charset="-122"/>
                 <a:cs typeface="Calibri" pitchFamily="34" charset="-120"/>
               </a:rPr>
-              <a:t>reportLiveness جایگزین کامل heartbeat خوداظهاری شد</a:t>
+              <a:t>تصمیم‌های وضعیت آف‌چین جایگزین کامل heartbeat/reportLiveness شد</a:t>
             </a:r>
             <a:endParaRPr lang="en-US" sz="1500" dirty="0"/>
           </a:p>
@@ -4480,7 +4480,7 @@
                 <a:ea typeface="Calibri" pitchFamily="34" charset="-122"/>
                 <a:cs typeface="Calibri" pitchFamily="34" charset="-120"/>
               </a:rPr>
-              <a:t>هر دو حالت (مثبت/منفی) توی مخرج نسبت شمرده می‌شن؛ فعال‌سازی نیازمند نسبت موفقیت ۹۵٪+، حداقل تعداد بررسی کافی، و تازگی آخرین گزارش مثبته — نه فقط شمارش خام.</a:t>
+              <a:t>نسبت ۹۵٪ و همه‌ی بررسی‌ها آف‌چین محاسبه می‌شود؛ روی زنجیره فقط تصمیم تغییر وضعیت + هش شواهد ثبت می‌شود.</a:t>
             </a:r>
             <a:endParaRPr lang="en-US" sz="1180" dirty="0"/>
           </a:p>
@@ -4594,7 +4594,7 @@
                 <a:ea typeface="Calibri" pitchFamily="34" charset="-122"/>
                 <a:cs typeface="Calibri" pitchFamily="34" charset="-120"/>
               </a:rPr>
-              <a:t>verifier اینجا فقط برای لایوینس است، نه هویت</a:t>
+              <a:t>verifier اینجا فقط برای تصمیم‌های وضعیت است، نه هویت</a:t>
             </a:r>
             <a:endParaRPr lang="en-US" sz="1500" dirty="0"/>
           </a:p>
@@ -5274,7 +5274,7 @@
                 <a:ea typeface="Calibri" pitchFamily="34" charset="-122"/>
                 <a:cs typeface="Calibri" pitchFamily="34" charset="-120"/>
               </a:rPr>
-              <a:t>promoteAfterProbation بعد از نسبت موفقیت ۹۵٪+ با حداقل تعداد بررسی کافی</a:t>
+              <a:t>recordActivation بعد از probation و نسبت ۹۵٪+ (محاسبه‌ی آف‌چین)</a:t>
             </a:r>
             <a:endParaRPr lang="en-US" sz="1050" dirty="0"/>
           </a:p>
@@ -5490,7 +5490,7 @@
                 <a:ea typeface="Calibri" pitchFamily="34" charset="-122"/>
                 <a:cs typeface="Calibri" pitchFamily="34" charset="-120"/>
               </a:rPr>
-              <a:t>demoteForInactivity بعد از inactivityThreshold بدون گزارش مثبت — permissionless</a:t>
+              <a:t>recordSuspension توسط verifier بعد از ۴ ساعت غیرفعالیِ تأییدشده — حذف فوری از مجموعه‌ی فعال</a:t>
             </a:r>
             <a:endParaRPr lang="en-US" sz="1050" dirty="0"/>
           </a:p>
@@ -5706,7 +5706,7 @@
                 <a:ea typeface="Calibri" pitchFamily="34" charset="-122"/>
                 <a:cs typeface="Calibri" pitchFamily="34" charset="-120"/>
               </a:rPr>
-              <a:t>promoteAfterRecovery حداقل recoveryPeriod بعد (نه ضرب‌الاجل)، با نسبت ۹۵٪+؛ جریمه‌ی slashBps مستقل و در لحظه‌ی دموت تعیین‌تکلیف می‌شود، نه در خروج</a:t>
+              <a:t>recordRecovery حداقل recoveryPeriod بعد، فقط اگر پرونده‌ی معلقی نمانده؛ جریمه‌ی slashBps بلافاصله اجرا نمی‌شود (رخداد جمعی ← تحویل ← اعتراض/رأی)</a:t>
             </a:r>
             <a:endParaRPr lang="en-US" sz="1050" dirty="0"/>
           </a:p>
@@ -6336,7 +6336,7 @@
                           <a:ea typeface="Calibri" pitchFamily="34" charset="-122"/>
                           <a:cs typeface="Calibri" pitchFamily="34" charset="-120"/>
                         </a:rPr>
-                        <a:t>permissionless — هرکسی، هر زمان</a:t>
+                        <a:t>permissionless — حداکثر هر ۳۰ روز (هیأت خالی: هر زمان)</a:t>
                       </a:r>
                       <a:endParaRPr lang="en-US" sz="1150" dirty="0">
                         <a:latin typeface="Calibri" charset="0"/>
@@ -6750,7 +6750,7 @@
                           <a:ea typeface="Calibri" pitchFamily="34" charset="-122"/>
                           <a:cs typeface="Calibri" pitchFamily="34" charset="-120"/>
                         </a:rPr>
-                        <a:t>عضو هیأت — زیر smallBudgetCap</a:t>
+                        <a:t>عضو دارای اختیار — حداقل ۳ رأی، در سقف‌های خزانه</a:t>
                       </a:r>
                       <a:endParaRPr lang="en-US" sz="1150" dirty="0">
                         <a:latin typeface="Calibri" charset="0"/>
@@ -7174,7 +7174,7 @@
                 <a:ea typeface="Cambria" pitchFamily="34" charset="-122"/>
                 <a:cs typeface="Cambria" pitchFamily="34" charset="-120"/>
               </a:rPr>
-              <a:t>۵ صندلی، رأی‌گیری تأییدی مستمر</a:t>
+              <a:t>۵ صندلی؛ رأی آزاد، ترکیب ماهانه</a:t>
             </a:r>
             <a:endParaRPr lang="en-US" sz="2400" dirty="0"/>
           </a:p>
@@ -7261,7 +7261,7 @@
                 <a:ea typeface="Calibri" pitchFamily="34" charset="-122"/>
                 <a:cs typeface="Calibri" pitchFamily="34" charset="-120"/>
               </a:rPr>
-              <a:t>بدون دوره‌ی زمانی — approval voting دائمی</a:t>
+              <a:t>رأی آزاد و دائمی؛ ترکیب عادی هر ۳۰ روز</a:t>
             </a:r>
             <a:endParaRPr lang="en-US" sz="1500" dirty="0"/>
           </a:p>
@@ -7300,7 +7300,7 @@
                 <a:ea typeface="Calibri" pitchFamily="34" charset="-122"/>
                 <a:cs typeface="Calibri" pitchFamily="34" charset="-120"/>
               </a:rPr>
-              <a:t>refreshBoard() هر زمان می‌تواند ترکیب هیأت را بر اساس رأی‌های فعلی بازمحاسبه کند.</a:t>
+              <a:t>refreshBoard() حداکثر هر ۳۰ روز ترکیب را اعمال می‌کند؛ درخواست خروج اختیار عضو را فوراً قطع و جانشین را فعال می‌کند؛ کمتر از ۳ عضو دارای اختیار = توقف پرداخت.</a:t>
             </a:r>
             <a:endParaRPr lang="en-US" sz="1180" dirty="0"/>
           </a:p>
@@ -7453,7 +7453,7 @@
                 <a:ea typeface="Calibri" pitchFamily="34" charset="-122"/>
                 <a:cs typeface="Calibri" pitchFamily="34" charset="-120"/>
               </a:rPr>
-              <a:t>هیچ پارامتر امنیتی بنیادین (slashBps، inactivityThreshold و مشابه) در اختیار هیأت نیست.</a:t>
+              <a:t>هیچ پارامتر امنیتی بنیادین (slashBps، recoveryPeriod و مشابه) در اختیار هیأت نیست.</a:t>
             </a:r>
             <a:endParaRPr lang="en-US" sz="1180" dirty="0"/>
           </a:p>
@@ -7842,7 +7842,7 @@
                 <a:ea typeface="Cambria" pitchFamily="34" charset="-122"/>
                 <a:cs typeface="Cambria" pitchFamily="34" charset="-120"/>
               </a:rPr>
-              <a:t>دو مسیر خرج</a:t>
+              <a:t>تنها مسیر خرج: هیأت، در سقف‌های مجمع</a:t>
             </a:r>
             <a:endParaRPr lang="en-US" sz="2400" dirty="0"/>
           </a:p>
@@ -8030,7 +8030,7 @@
                           <a:ea typeface="Courier New" pitchFamily="34" charset="-122"/>
                           <a:cs typeface="Courier New" pitchFamily="34" charset="-120"/>
                         </a:rPr>
-                        <a:t>proposeExpenditure</a:t>
+                        <a:t>proposeCapChange</a:t>
                       </a:r>
                       <a:endParaRPr lang="en-US" sz="1300" dirty="0">
                         <a:latin typeface="Courier New" charset="0"/>
@@ -8098,7 +8098,7 @@
                           <a:ea typeface="Calibri" pitchFamily="34" charset="-122"/>
                           <a:cs typeface="Calibri" pitchFamily="34" charset="-120"/>
                         </a:rPr>
-                        <a:t>هر ولیدیتور Active — رأی کامل مجمع ولیدیتورها</a:t>
+                        <a:t>ولیدیتور Active — رأی مجمع + تأخیر ۷روزه</a:t>
                       </a:r>
                       <a:endParaRPr lang="en-US" sz="1300" dirty="0">
                         <a:latin typeface="Calibri" charset="0"/>
@@ -8168,7 +8168,7 @@
                           <a:ea typeface="Courier New" pitchFamily="34" charset="-122"/>
                           <a:cs typeface="Courier New" pitchFamily="34" charset="-120"/>
                         </a:rPr>
-                        <a:t>voteExpenditure</a:t>
+                        <a:t>voteCapChange / applyPendingCapChange</a:t>
                       </a:r>
                       <a:endParaRPr lang="en-US" sz="1300" dirty="0">
                         <a:latin typeface="Courier New" charset="0"/>
@@ -8236,7 +8236,7 @@
                           <a:ea typeface="Calibri" pitchFamily="34" charset="-122"/>
                           <a:cs typeface="Calibri" pitchFamily="34" charset="-120"/>
                         </a:rPr>
-                        <a:t>رأی ولیدیتورهای فعال به یک proposeExpenditure</a:t>
+                        <a:t>رأی مجمع؛ اعمال فقط بعد از ۷ روز</a:t>
                       </a:r>
                       <a:endParaRPr lang="en-US" sz="1300" dirty="0">
                         <a:latin typeface="Calibri" charset="0"/>
@@ -8374,7 +8374,7 @@
                           <a:ea typeface="Calibri" pitchFamily="34" charset="-122"/>
                           <a:cs typeface="Calibri" pitchFamily="34" charset="-120"/>
                         </a:rPr>
-                        <a:t>فقط ValidatorsBoard — فقط زیر smallBudgetCap</a:t>
+                        <a:t>فقط ValidatorsBoard — هر پرداخت &lt; ۵۰٬۰۰۰ و مجموع ۳۰روزه ≤ ۲۰۰٬۰۰۰ سورن</a:t>
                       </a:r>
                       <a:endParaRPr lang="en-US" sz="1300" dirty="0">
                         <a:latin typeface="Calibri" charset="0"/>
@@ -8986,7 +8986,7 @@
                           <a:ea typeface="Courier New" pitchFamily="34" charset="-122"/>
                           <a:cs typeface="Courier New" pitchFamily="34" charset="-120"/>
                         </a:rPr>
-                        <a:t>distributeRewards(validators[], blocksMined[], totalRewards, totalFees)</a:t>
+                        <a:t>distributeRewards(range{from,to}, validators[], blocksMined[], totalRewards, totalFees)</a:t>
                       </a:r>
                       <a:endParaRPr lang="en-US" sz="1200" dirty="0">
                         <a:latin typeface="Courier New" charset="0"/>
@@ -9054,7 +9054,7 @@
                           <a:ea typeface="Calibri" pitchFamily="34" charset="-122"/>
                           <a:cs typeface="Calibri" pitchFamily="34" charset="-120"/>
                         </a:rPr>
-                        <a:t>فقط distributionOracle، هر epoch (~۲۳ ساعت)</a:t>
+                        <a:t>فقط distributionOracle، هر epoch (~۲۳ ساعت)؛ بازه باید دقیقاً بعد از lastSettledBlock شروع شود</a:t>
                       </a:r>
                       <a:endParaRPr lang="en-US" sz="1200" dirty="0">
                         <a:latin typeface="Calibri" charset="0"/>
@@ -17300,7 +17300,7 @@
                 <a:ea typeface="Calibri" pitchFamily="34" charset="-122"/>
                 <a:cs typeface="Calibri" pitchFamily="34" charset="-120"/>
               </a:rPr>
-              <a:t>از last_scanned تا head — بدون margin (QBFT نهایی‌شدن فوری دارد)</a:t>
+              <a:t>از lastSettledBlock+1 تا head−1 — بدون margin (QBFT نهایی‌شدن فوری دارد)</a:t>
             </a:r>
             <a:endParaRPr lang="en-US" sz="1050" dirty="0"/>
           </a:p>
@@ -17948,7 +17948,7 @@
                 <a:ea typeface="Calibri" pitchFamily="34" charset="-122"/>
                 <a:cs typeface="Calibri" pitchFamily="34" charset="-120"/>
               </a:rPr>
-              <a:t>امضا با کلید Vault؛ state فقط بعد از تأیید واقعی commit می‌شود</a:t>
+              <a:t>بازه‌ی دقیق و پیوسته؛ امضا با کلید Vault؛ state فقط بعد از تأیید واقعی commit می‌شود</a:t>
             </a:r>
             <a:endParaRPr lang="en-US" sz="1050" dirty="0"/>
           </a:p>
@@ -18463,7 +18463,7 @@
                 <a:ea typeface="Calibri" pitchFamily="34" charset="-122"/>
                 <a:cs typeface="Calibri" pitchFamily="34" charset="-120"/>
               </a:rPr>
-              <a:t>پنجره‌ی ~۱۲۰۰ بلاک اخیر (۱ ساعت با blockperiodseconds=3)؛ حداقل یک بلاک کافی است.</a:t>
+              <a:t>پنجره‌ی ~۴۸۰۰ بلاک (۴ ساعت)؛ صرف نبود بلاک کافی نیست — فرصت مشارکت و سلامت شبکه هم بررسی می‌شود.</a:t>
             </a:r>
             <a:endParaRPr lang="en-US" sz="1180" dirty="0"/>
           </a:p>
@@ -18577,7 +18577,7 @@
                 <a:ea typeface="Calibri" pitchFamily="34" charset="-122"/>
                 <a:cs typeface="Calibri" pitchFamily="34" charset="-120"/>
               </a:rPr>
-              <a:t>افزونگی: ۲-۳ نمونه‌ی polling مستقل + یک سرویس امضای مشترک</a:t>
+              <a:t>یک Verifier؛ افزونگی فقط برای دسترس‌پذیری: نمونه‌ی polling جانشین + سرویس امضای مشترک (نه چندناظری)</a:t>
             </a:r>
             <a:endParaRPr lang="en-US" sz="1500" dirty="0"/>
           </a:p>
@@ -28979,7 +28979,7 @@
                           <a:ea typeface="Courier New" pitchFamily="34" charset="-122"/>
                           <a:cs typeface="Courier New" pitchFamily="34" charset="-120"/>
                         </a:rPr>
-                        <a:t>reportLiveness(addr, bool)</a:t>
+                        <a:t>recordActivation / recordSuspension / recordPreExitViolation / recordRecovery</a:t>
                       </a:r>
                       <a:endParaRPr lang="en-US" sz="1150" dirty="0">
                         <a:latin typeface="Courier New" charset="0"/>
@@ -29047,7 +29047,7 @@
                           <a:ea typeface="Calibri" pitchFamily="34" charset="-122"/>
                           <a:cs typeface="Calibri" pitchFamily="34" charset="-120"/>
                         </a:rPr>
-                        <a:t>فقط verifier</a:t>
+                        <a:t>فقط verifier — فقط هنگام تغییر وضعیت (هش شواهد)</a:t>
                       </a:r>
                       <a:endParaRPr lang="en-US" sz="1150" dirty="0">
                         <a:latin typeface="Calibri" charset="0"/>
@@ -29117,7 +29117,7 @@
                           <a:ea typeface="Courier New" pitchFamily="34" charset="-122"/>
                           <a:cs typeface="Courier New" pitchFamily="34" charset="-120"/>
                         </a:rPr>
-                        <a:t>promoteAfterProbation / demoteForInactivity / promoteAfterRecovery</a:t>
+                        <a:t>resolveMassFailureCheck / confirmDelivery / fileAppeal / confirmSlash / executeUncontestedSlash</a:t>
                       </a:r>
                       <a:endParaRPr lang="en-US" sz="1150" dirty="0">
                         <a:latin typeface="Courier New" charset="0"/>
@@ -29185,7 +29185,7 @@
                           <a:ea typeface="Calibri" pitchFamily="34" charset="-122"/>
                           <a:cs typeface="Calibri" pitchFamily="34" charset="-120"/>
                         </a:rPr>
-                        <a:t>permissionless — هرکسی</a:t>
+                        <a:t>مسیر معافیت جمعی ← تحویل ← اعتراض ← رأی مجمع (بخشی permissionless)</a:t>
                       </a:r>
                       <a:endParaRPr lang="en-US" sz="1150" dirty="0">
                         <a:latin typeface="Calibri" charset="0"/>
@@ -29255,7 +29255,7 @@
                           <a:ea typeface="Courier New" pitchFamily="34" charset="-122"/>
                           <a:cs typeface="Courier New" pitchFamily="34" charset="-120"/>
                         </a:rPr>
-                        <a:t>withdrawStake()</a:t>
+                        <a:t>requestExit() / withdrawStake()</a:t>
                       </a:r>
                       <a:endParaRPr lang="en-US" sz="1150" dirty="0">
                         <a:latin typeface="Courier New" charset="0"/>
@@ -29323,7 +29323,7 @@
                           <a:ea typeface="Calibri" pitchFamily="34" charset="-122"/>
                           <a:cs typeface="Calibri" pitchFamily="34" charset="-120"/>
                         </a:rPr>
-                        <a:t>خودِ ولیدیتور، بعد از exitCooldown</a:t>
+                        <a:t>خودِ ولیدیتور؛ خروج فوراً وظیفه را پایان می‌دهد؛ برداشت بعد از ۷ روز؛ مبلغ درگیر پرونده محفوظ</a:t>
                       </a:r>
                       <a:endParaRPr lang="en-US" sz="1150" dirty="0">
                         <a:latin typeface="Calibri" charset="0"/>
@@ -29669,7 +29669,7 @@
                           <a:ea typeface="Courier New" pitchFamily="34" charset="-122"/>
                           <a:cs typeface="Courier New" pitchFamily="34" charset="-120"/>
                         </a:rPr>
-                        <a:t>پارامترهای امنیتی (slashBps, inactivityThreshold, ...)</a:t>
+                        <a:t>پارامترهای امنیتی (slashBps, recoveryPeriod, exitCooldown, ...)</a:t>
                       </a:r>
                       <a:endParaRPr lang="en-US" sz="1150" dirty="0">
                         <a:latin typeface="Courier New" charset="0"/>

--- a/presentations/Sur - Technical Team Presentation.pptx
+++ b/presentations/Sur - Technical Team Presentation.pptx
@@ -7300,7 +7300,7 @@
                 <a:ea typeface="Calibri" pitchFamily="34" charset="-122"/>
                 <a:cs typeface="Calibri" pitchFamily="34" charset="-120"/>
               </a:rPr>
-              <a:t>refreshBoard() حداکثر هر ۳۰ روز ترکیب را اعمال می‌کند؛ درخواست خروج اختیار عضو را فوراً قطع و جانشین را فعال می‌کند؛ کمتر از ۳ عضو دارای اختیار = توقف پرداخت.</a:t>
+              <a:t>refreshBoard() حداکثر هر ۳۰ روز ترکیب را اعمال می‌کند؛ صفر رأی به‌تنهایی هیأت را خالی نمی‌کند — عضو فعلی کرسی‌اش را حفظ می‌کند؛ درخواست خروج اختیار عضو را فوراً قطع و جانشین را فعال می‌کند؛ کمتر از ۳ عضو دارای اختیار = توقف پرداخت</a:t>
             </a:r>
             <a:endParaRPr lang="en-US" sz="1180" dirty="0"/>
           </a:p>
@@ -8374,7 +8374,7 @@
                           <a:ea typeface="Calibri" pitchFamily="34" charset="-122"/>
                           <a:cs typeface="Calibri" pitchFamily="34" charset="-120"/>
                         </a:rPr>
-                        <a:t>فقط ValidatorsBoard — هر پرداخت &lt; ۵۰٬۰۰۰ و مجموع ۳۰روزه ≤ ۲۰۰٬۰۰۰ سورن</a:t>
+                        <a:t>فقط ValidatorsBoard — هر پرداخت ≤ ۵۰٬۰۰۰ و مجموع ۳۰روزه ≤ ۲۰۰٬۰۰۰ سورن</a:t>
                       </a:r>
                       <a:endParaRPr lang="en-US" sz="1300" dirty="0">
                         <a:latin typeface="Calibri" charset="0"/>

--- a/presentations/Sur - Technical Team Presentation.pptx
+++ b/presentations/Sur - Technical Team Presentation.pptx
@@ -6612,7 +6612,7 @@
                           <a:ea typeface="Calibri" pitchFamily="34" charset="-122"/>
                           <a:cs typeface="Calibri" pitchFamily="34" charset="-120"/>
                         </a:rPr>
-                        <a:t>عضو هیأت — رأی داخلی اکثریت</a:t>
+                        <a:t>عضو دارای اختیار زنده — رأی داخلی اکثریت</a:t>
                       </a:r>
                       <a:endParaRPr lang="en-US" sz="1150" dirty="0">
                         <a:latin typeface="Calibri" charset="0"/>
@@ -6750,7 +6750,7 @@
                           <a:ea typeface="Calibri" pitchFamily="34" charset="-122"/>
                           <a:cs typeface="Calibri" pitchFamily="34" charset="-120"/>
                         </a:rPr>
-                        <a:t>عضو دارای اختیار — حداقل ۳ رأی، در سقف‌های خزانه</a:t>
+                        <a:t>عضو دارای اختیار زنده — حداقل ۳ رأی، در سقف‌های خزانه (تنها مسیر خرج)</a:t>
                       </a:r>
                       <a:endParaRPr lang="en-US" sz="1150" dirty="0">
                         <a:latin typeface="Calibri" charset="0"/>
@@ -6888,7 +6888,7 @@
                           <a:ea typeface="Calibri" pitchFamily="34" charset="-122"/>
                           <a:cs typeface="Calibri" pitchFamily="34" charset="-120"/>
                         </a:rPr>
-                        <a:t>عضو هیأت — رأی داخلی اکثریت</a:t>
+                        <a:t>عضو دارای اختیار زنده — رأی داخلی اکثریت</a:t>
                       </a:r>
                       <a:endParaRPr lang="en-US" sz="1150" dirty="0">
                         <a:latin typeface="Calibri" charset="0"/>
@@ -7300,7 +7300,7 @@
                 <a:ea typeface="Calibri" pitchFamily="34" charset="-122"/>
                 <a:cs typeface="Calibri" pitchFamily="34" charset="-120"/>
               </a:rPr>
-              <a:t>refreshBoard() حداکثر هر ۳۰ روز ترکیب را اعمال می‌کند؛ صفر رأی به‌تنهایی هیأت را خالی نمی‌کند — عضو فعلی کرسی‌اش را حفظ می‌کند؛ درخواست خروج اختیار عضو را فوراً قطع و جانشین را فعال می‌کند؛ کمتر از ۳ عضو دارای اختیار = توقف پرداخت</a:t>
+              <a:t>refreshBoard() حداکثر هر ۳۰ روز ترکیب را اعمال می‌کند؛ عضو فعلی با صفر رأی هم کرسی‌اش را حفظ می‌کند (حداکثر یک چالشگر با رأی بیشتر جای کم‌رأی‌ترین را می‌گیرد)؛ درخواست خروج اختیار را فوراً قطع و جانشین را فعال می‌کند؛ تعلیق تا بازتعیین ماهانه اختیار را قطع نمی‌کند؛ کمتر از ۳ عضو دارای اختیار = توقف پرداخت</a:t>
             </a:r>
             <a:endParaRPr lang="en-US" sz="1180" dirty="0"/>
           </a:p>
@@ -9054,7 +9054,7 @@
                           <a:ea typeface="Calibri" pitchFamily="34" charset="-122"/>
                           <a:cs typeface="Calibri" pitchFamily="34" charset="-120"/>
                         </a:rPr>
-                        <a:t>فقط distributionOracle، هر epoch (~۲۳ ساعت)؛ بازه باید دقیقاً بعد از lastSettledBlock شروع شود</a:t>
+                        <a:t>فقط distributionOracle، هر epoch (~۲۳ ساعت)؛ بازه دقیقاً بعد از lastSettledBlock؛ هر گیرنده everActivated؛ استحقاق تاریخی (N−1) با اوراکل — مرز اعتماد</a:t>
                       </a:r>
                       <a:endParaRPr lang="en-US" sz="1200" dirty="0">
                         <a:latin typeface="Calibri" charset="0"/>
@@ -11842,7 +11842,7 @@
                           <a:ea typeface="Courier New" pitchFamily="34" charset="-122"/>
                           <a:cs typeface="Courier New" pitchFamily="34" charset="-120"/>
                         </a:rPr>
-                        <a:t>currentPriceToman() / isSaleActive()</a:t>
+                        <a:t>currentPriceMilliToman() (تسویه) / currentPriceToman() (نمایش) / isSaleActive()</a:t>
                       </a:r>
                       <a:endParaRPr lang="en-US" sz="1200" dirty="0">
                         <a:latin typeface="Courier New" charset="0"/>
@@ -12048,7 +12048,7 @@
                           <a:ea typeface="Calibri" pitchFamily="34" charset="-122"/>
                           <a:cs typeface="Calibri" pitchFamily="34" charset="-120"/>
                         </a:rPr>
-                        <a:t>فقط paymentOracle — با چک processedPayments</a:t>
+                        <a:t>فقط paymentOracle — تسویه با currentPriceMilliToman؛ چک processedPayments</a:t>
                       </a:r>
                       <a:endParaRPr lang="en-US" sz="1200" dirty="0">
                         <a:latin typeface="Calibri" charset="0"/>
@@ -16345,7 +16345,7 @@
                           <a:ea typeface="Calibri" pitchFamily="34" charset="-122"/>
                           <a:cs typeface="Calibri" pitchFamily="34" charset="-120"/>
                         </a:rPr>
-                        <a:t>احراز موبایل/تلگرام + گزارش liveness</a:t>
+                        <a:t>گزارش liveness و وضعیت ولیدیتور</a:t>
                       </a:r>
                       <a:endParaRPr lang="en-US" sz="1100" dirty="0">
                         <a:latin typeface="Calibri" charset="0"/>
@@ -16757,7 +16757,7 @@
                           <a:ea typeface="Calibri" pitchFamily="34" charset="-122"/>
                           <a:cs typeface="Calibri" pitchFamily="34" charset="-120"/>
                         </a:rPr>
-                        <a:t>یکپارچه‌سازی eKYC + matching API برای دپ‌ها</a:t>
+                        <a:t>eKYC + احراز موبایل/تلگرام + matching API</a:t>
                       </a:r>
                       <a:endParaRPr lang="en-US" sz="1100" dirty="0">
                         <a:latin typeface="Calibri" charset="0"/>
@@ -17300,7 +17300,7 @@
                 <a:ea typeface="Calibri" pitchFamily="34" charset="-122"/>
                 <a:cs typeface="Calibri" pitchFamily="34" charset="-120"/>
               </a:rPr>
-              <a:t>از lastSettledBlock+1 تا head−1 — بدون margin (QBFT نهایی‌شدن فوری دارد)</a:t>
+              <a:t>از lastSettledBlock+1 تا L (آخرین بلاک مهرشده) — بدون margin</a:t>
             </a:r>
             <a:endParaRPr lang="en-US" sz="1050" dirty="0"/>
           </a:p>
@@ -17516,7 +17516,7 @@
                 <a:ea typeface="Calibri" pitchFamily="34" charset="-122"/>
                 <a:cs typeface="Calibri" pitchFamily="34" charset="-120"/>
               </a:rPr>
-              <a:t>ریوارد از trace، فی از gasUsed×effectiveGasPrice</a:t>
+              <a:t>ریوارد از trace؛ فی = gasUsed×(effectiveGasPrice−baseFee)</a:t>
             </a:r>
             <a:endParaRPr lang="en-US" sz="1050" dirty="0"/>
           </a:p>
@@ -17693,7 +17693,7 @@
                 <a:ea typeface="Calibri" pitchFamily="34" charset="-122"/>
                 <a:cs typeface="Calibri" pitchFamily="34" charset="-120"/>
               </a:rPr>
-              <a:t>Aggregate + چک isValidator</a:t>
+              <a:t>Aggregate + استحقاق تاریخی</a:t>
             </a:r>
             <a:endParaRPr lang="en-US" sz="1250" dirty="0"/>
           </a:p>
@@ -17732,7 +17732,7 @@
                 <a:ea typeface="Calibri" pitchFamily="34" charset="-122"/>
                 <a:cs typeface="Calibri" pitchFamily="34" charset="-120"/>
               </a:rPr>
-              <a:t>فقط آدرس‌های هنوز معتبر لحظه‌ی ارسال</a:t>
+              <a:t>فعال هنگام تولید (N−1)؛ قرارداد everActivated را چک می‌کند</a:t>
             </a:r>
             <a:endParaRPr lang="en-US" sz="1050" dirty="0"/>
           </a:p>
@@ -21715,7 +21715,7 @@
                 <a:ea typeface="Calibri" pitchFamily="34" charset="-122"/>
                 <a:cs typeface="Calibri" pitchFamily="34" charset="-120"/>
               </a:rPr>
-              <a:t>ابزار ساخت genesis.json — هنوز اجرا نشده، فقط طراحی شده</a:t>
+              <a:t>ابزار production ساخت genesis.json — هنوز پیاده‌سازی نشده؛ آزمون‌های Besu با اسکریپت آزمایشی بودند</a:t>
             </a:r>
             <a:endParaRPr lang="en-US" sz="1500" dirty="0"/>
           </a:p>
@@ -23663,7 +23663,7 @@
                           <a:ea typeface="Calibri" pitchFamily="34" charset="-122"/>
                           <a:cs typeface="Calibri" pitchFamily="34" charset="-120"/>
                         </a:rPr>
-                        <a:t>هنوز انجام نشده — طراحی کامل، پیاده‌سازی باقی</a:t>
+                        <a:t>هنوز انجام نشده (T02)؛ آزمون‌های Besu با اسکریپت آزمایشی؛ کد فعلی روی Besu آزموده نشده</a:t>
                       </a:r>
                       <a:endParaRPr lang="en-US" sz="1100" dirty="0">
                         <a:latin typeface="Calibri" charset="0"/>
@@ -27300,7 +27300,7 @@
                           <a:ea typeface="Calibri" pitchFamily="34" charset="-122"/>
                           <a:cs typeface="Calibri" pitchFamily="34" charset="-120"/>
                         </a:rPr>
-                        <a:t>هر عضو — نصاب دوسوم (۱۰/۱۵)</a:t>
+                        <a:t>هر عضو — نصاب اکثریت ساده (۸/۱۵)</a:t>
                       </a:r>
                       <a:endParaRPr lang="en-US" sz="1250" dirty="0">
                         <a:latin typeface="Calibri" charset="0"/>
@@ -27784,7 +27784,7 @@
                           <a:ea typeface="Courier New" pitchFamily="34" charset="-122"/>
                           <a:cs typeface="Courier New" pitchFamily="34" charset="-120"/>
                         </a:rPr>
-                        <a:t>getMemberCount / getAllMembers / getProposal</a:t>
+                        <a:t>getMemberCount / getAllMembers / getProposal / getProposalMeta</a:t>
                       </a:r>
                       <a:endParaRPr lang="en-US" sz="1250" dirty="0">
                         <a:latin typeface="Courier New" charset="0"/>

--- a/presentations/Sur - Technical Team Presentation.pptx
+++ b/presentations/Sur - Technical Team Presentation.pptx
@@ -5980,7 +5980,7 @@
                     <a:bodyPr/>
                     <a:lstStyle/>
                     <a:p>
-                      <a:pPr algn="ctr" indent="0" marL="0">
+                      <a:pPr rtl="1" algn="ctr" indent="0" marL="0">
                         <a:buNone/>
                       </a:pPr>
                       <a:r>
@@ -6048,7 +6048,7 @@
                     <a:bodyPr/>
                     <a:lstStyle/>
                     <a:p>
-                      <a:pPr algn="ctr" indent="0" marL="0">
+                      <a:pPr rtl="1" algn="ctr" indent="0" marL="0">
                         <a:buNone/>
                       </a:pPr>
                       <a:r>
@@ -6186,7 +6186,7 @@
                     <a:bodyPr/>
                     <a:lstStyle/>
                     <a:p>
-                      <a:pPr algn="ctr" indent="0" marL="0">
+                      <a:pPr rtl="1" algn="ctr" indent="0" marL="0">
                         <a:buNone/>
                       </a:pPr>
                       <a:r>
@@ -6324,7 +6324,7 @@
                     <a:bodyPr/>
                     <a:lstStyle/>
                     <a:p>
-                      <a:pPr algn="ctr" indent="0" marL="0">
+                      <a:pPr rtl="1" algn="ctr" indent="0" marL="0">
                         <a:buNone/>
                       </a:pPr>
                       <a:r>
@@ -6462,7 +6462,7 @@
                     <a:bodyPr/>
                     <a:lstStyle/>
                     <a:p>
-                      <a:pPr algn="ctr" indent="0" marL="0">
+                      <a:pPr rtl="1" algn="ctr" indent="0" marL="0">
                         <a:buNone/>
                       </a:pPr>
                       <a:r>
@@ -6600,7 +6600,7 @@
                     <a:bodyPr/>
                     <a:lstStyle/>
                     <a:p>
-                      <a:pPr algn="ctr" indent="0" marL="0">
+                      <a:pPr rtl="1" algn="ctr" indent="0" marL="0">
                         <a:buNone/>
                       </a:pPr>
                       <a:r>
@@ -6738,7 +6738,7 @@
                     <a:bodyPr/>
                     <a:lstStyle/>
                     <a:p>
-                      <a:pPr algn="ctr" indent="0" marL="0">
+                      <a:pPr rtl="1" algn="ctr" indent="0" marL="0">
                         <a:buNone/>
                       </a:pPr>
                       <a:r>
@@ -6876,7 +6876,7 @@
                     <a:bodyPr/>
                     <a:lstStyle/>
                     <a:p>
-                      <a:pPr algn="ctr" indent="0" marL="0">
+                      <a:pPr rtl="1" algn="ctr" indent="0" marL="0">
                         <a:buNone/>
                       </a:pPr>
                       <a:r>
@@ -7880,7 +7880,7 @@
                     <a:bodyPr/>
                     <a:lstStyle/>
                     <a:p>
-                      <a:pPr algn="ctr" indent="0" marL="0">
+                      <a:pPr rtl="1" algn="ctr" indent="0" marL="0">
                         <a:buNone/>
                       </a:pPr>
                       <a:r>
@@ -7948,7 +7948,7 @@
                     <a:bodyPr/>
                     <a:lstStyle/>
                     <a:p>
-                      <a:pPr algn="ctr" indent="0" marL="0">
+                      <a:pPr rtl="1" algn="ctr" indent="0" marL="0">
                         <a:buNone/>
                       </a:pPr>
                       <a:r>
@@ -8086,7 +8086,7 @@
                     <a:bodyPr/>
                     <a:lstStyle/>
                     <a:p>
-                      <a:pPr algn="ctr" indent="0" marL="0">
+                      <a:pPr rtl="1" algn="ctr" indent="0" marL="0">
                         <a:buNone/>
                       </a:pPr>
                       <a:r>
@@ -8224,7 +8224,7 @@
                     <a:bodyPr/>
                     <a:lstStyle/>
                     <a:p>
-                      <a:pPr algn="ctr" indent="0" marL="0">
+                      <a:pPr rtl="1" algn="ctr" indent="0" marL="0">
                         <a:buNone/>
                       </a:pPr>
                       <a:r>
@@ -8362,7 +8362,7 @@
                     <a:bodyPr/>
                     <a:lstStyle/>
                     <a:p>
-                      <a:pPr algn="ctr" indent="0" marL="0">
+                      <a:pPr rtl="1" algn="ctr" indent="0" marL="0">
                         <a:buNone/>
                       </a:pPr>
                       <a:r>
@@ -8698,7 +8698,7 @@
                     <a:bodyPr/>
                     <a:lstStyle/>
                     <a:p>
-                      <a:pPr algn="ctr" indent="0" marL="0">
+                      <a:pPr rtl="1" algn="ctr" indent="0" marL="0">
                         <a:buNone/>
                       </a:pPr>
                       <a:r>
@@ -8766,7 +8766,7 @@
                     <a:bodyPr/>
                     <a:lstStyle/>
                     <a:p>
-                      <a:pPr algn="ctr" indent="0" marL="0">
+                      <a:pPr rtl="1" algn="ctr" indent="0" marL="0">
                         <a:buNone/>
                       </a:pPr>
                       <a:r>
@@ -8904,7 +8904,7 @@
                     <a:bodyPr/>
                     <a:lstStyle/>
                     <a:p>
-                      <a:pPr algn="ctr" indent="0" marL="0">
+                      <a:pPr rtl="1" algn="ctr" indent="0" marL="0">
                         <a:buNone/>
                       </a:pPr>
                       <a:r>
@@ -9042,7 +9042,7 @@
                     <a:bodyPr/>
                     <a:lstStyle/>
                     <a:p>
-                      <a:pPr algn="ctr" indent="0" marL="0">
+                      <a:pPr rtl="1" algn="ctr" indent="0" marL="0">
                         <a:buNone/>
                       </a:pPr>
                       <a:r>
@@ -9180,7 +9180,7 @@
                     <a:bodyPr/>
                     <a:lstStyle/>
                     <a:p>
-                      <a:pPr algn="ctr" indent="0" marL="0">
+                      <a:pPr rtl="1" algn="ctr" indent="0" marL="0">
                         <a:buNone/>
                       </a:pPr>
                       <a:r>
@@ -9318,7 +9318,7 @@
                     <a:bodyPr/>
                     <a:lstStyle/>
                     <a:p>
-                      <a:pPr algn="ctr" indent="0" marL="0">
+                      <a:pPr rtl="1" algn="ctr" indent="0" marL="0">
                         <a:buNone/>
                       </a:pPr>
                       <a:r>
@@ -9654,7 +9654,7 @@
                     <a:bodyPr/>
                     <a:lstStyle/>
                     <a:p>
-                      <a:pPr algn="ctr" indent="0" marL="0">
+                      <a:pPr rtl="1" algn="ctr" indent="0" marL="0">
                         <a:buNone/>
                       </a:pPr>
                       <a:r>
@@ -9722,7 +9722,7 @@
                     <a:bodyPr/>
                     <a:lstStyle/>
                     <a:p>
-                      <a:pPr algn="ctr" indent="0" marL="0">
+                      <a:pPr rtl="1" algn="ctr" indent="0" marL="0">
                         <a:buNone/>
                       </a:pPr>
                       <a:r>
@@ -9860,7 +9860,7 @@
                     <a:bodyPr/>
                     <a:lstStyle/>
                     <a:p>
-                      <a:pPr algn="ctr" indent="0" marL="0">
+                      <a:pPr rtl="1" algn="ctr" indent="0" marL="0">
                         <a:buNone/>
                       </a:pPr>
                       <a:r>
@@ -9998,7 +9998,7 @@
                     <a:bodyPr/>
                     <a:lstStyle/>
                     <a:p>
-                      <a:pPr algn="ctr" indent="0" marL="0">
+                      <a:pPr rtl="1" algn="ctr" indent="0" marL="0">
                         <a:buNone/>
                       </a:pPr>
                       <a:r>
@@ -10136,7 +10136,7 @@
                     <a:bodyPr/>
                     <a:lstStyle/>
                     <a:p>
-                      <a:pPr algn="ctr" indent="0" marL="0">
+                      <a:pPr rtl="1" algn="ctr" indent="0" marL="0">
                         <a:buNone/>
                       </a:pPr>
                       <a:r>
@@ -10274,7 +10274,7 @@
                     <a:bodyPr/>
                     <a:lstStyle/>
                     <a:p>
-                      <a:pPr algn="ctr" indent="0" marL="0">
+                      <a:pPr rtl="1" algn="ctr" indent="0" marL="0">
                         <a:buNone/>
                       </a:pPr>
                       <a:r>
@@ -10412,7 +10412,7 @@
                     <a:bodyPr/>
                     <a:lstStyle/>
                     <a:p>
-                      <a:pPr algn="ctr" indent="0" marL="0">
+                      <a:pPr rtl="1" algn="ctr" indent="0" marL="0">
                         <a:buNone/>
                       </a:pPr>
                       <a:r>
@@ -10550,7 +10550,7 @@
                     <a:bodyPr/>
                     <a:lstStyle/>
                     <a:p>
-                      <a:pPr algn="ctr" indent="0" marL="0">
+                      <a:pPr rtl="1" algn="ctr" indent="0" marL="0">
                         <a:buNone/>
                       </a:pPr>
                       <a:r>
@@ -11554,7 +11554,7 @@
                     <a:bodyPr/>
                     <a:lstStyle/>
                     <a:p>
-                      <a:pPr algn="ctr" indent="0" marL="0">
+                      <a:pPr rtl="1" algn="ctr" indent="0" marL="0">
                         <a:buNone/>
                       </a:pPr>
                       <a:r>
@@ -11622,7 +11622,7 @@
                     <a:bodyPr/>
                     <a:lstStyle/>
                     <a:p>
-                      <a:pPr algn="ctr" indent="0" marL="0">
+                      <a:pPr rtl="1" algn="ctr" indent="0" marL="0">
                         <a:buNone/>
                       </a:pPr>
                       <a:r>
@@ -11760,7 +11760,7 @@
                     <a:bodyPr/>
                     <a:lstStyle/>
                     <a:p>
-                      <a:pPr algn="ctr" indent="0" marL="0">
+                      <a:pPr rtl="1" algn="ctr" indent="0" marL="0">
                         <a:buNone/>
                       </a:pPr>
                       <a:r>
@@ -11842,7 +11842,7 @@
                           <a:ea typeface="Courier New" pitchFamily="34" charset="-122"/>
                           <a:cs typeface="Courier New" pitchFamily="34" charset="-120"/>
                         </a:rPr>
-                        <a:t>currentPriceMilliToman() (تسویه) / currentPriceToman() (نمایش) / isSaleActive()</a:t>
+                        <a:t>currentPriceMilliToman() [settlement] / currentPriceToman() [display] / isSaleActive()</a:t>
                       </a:r>
                       <a:endParaRPr lang="en-US" sz="1200" dirty="0">
                         <a:latin typeface="Courier New" charset="0"/>
@@ -11898,7 +11898,7 @@
                     <a:bodyPr/>
                     <a:lstStyle/>
                     <a:p>
-                      <a:pPr algn="ctr" indent="0" marL="0">
+                      <a:pPr rtl="1" algn="ctr" indent="0" marL="0">
                         <a:buNone/>
                       </a:pPr>
                       <a:r>
@@ -12036,7 +12036,7 @@
                     <a:bodyPr/>
                     <a:lstStyle/>
                     <a:p>
-                      <a:pPr algn="ctr" indent="0" marL="0">
+                      <a:pPr rtl="1" algn="ctr" indent="0" marL="0">
                         <a:buNone/>
                       </a:pPr>
                       <a:r>
@@ -12174,7 +12174,7 @@
                     <a:bodyPr/>
                     <a:lstStyle/>
                     <a:p>
-                      <a:pPr algn="ctr" indent="0" marL="0">
+                      <a:pPr rtl="1" algn="ctr" indent="0" marL="0">
                         <a:buNone/>
                       </a:pPr>
                       <a:r>
@@ -12312,7 +12312,7 @@
                     <a:bodyPr/>
                     <a:lstStyle/>
                     <a:p>
-                      <a:pPr algn="ctr" indent="0" marL="0">
+                      <a:pPr rtl="1" algn="ctr" indent="0" marL="0">
                         <a:buNone/>
                       </a:pPr>
                       <a:r>
@@ -13288,7 +13288,7 @@
                     <a:bodyPr/>
                     <a:lstStyle/>
                     <a:p>
-                      <a:pPr algn="ctr" indent="0" marL="0">
+                      <a:pPr rtl="1" algn="ctr" indent="0" marL="0">
                         <a:buNone/>
                       </a:pPr>
                       <a:r>
@@ -13356,7 +13356,7 @@
                     <a:bodyPr/>
                     <a:lstStyle/>
                     <a:p>
-                      <a:pPr algn="ctr" indent="0" marL="0">
+                      <a:pPr rtl="1" algn="ctr" indent="0" marL="0">
                         <a:buNone/>
                       </a:pPr>
                       <a:r>
@@ -13424,7 +13424,7 @@
                     <a:bodyPr/>
                     <a:lstStyle/>
                     <a:p>
-                      <a:pPr algn="ctr" indent="0" marL="0">
+                      <a:pPr rtl="1" algn="ctr" indent="0" marL="0">
                         <a:buNone/>
                       </a:pPr>
                       <a:r>
@@ -13492,7 +13492,7 @@
                     <a:bodyPr/>
                     <a:lstStyle/>
                     <a:p>
-                      <a:pPr algn="ctr" indent="0" marL="0">
+                      <a:pPr rtl="1" algn="ctr" indent="0" marL="0">
                         <a:buNone/>
                       </a:pPr>
                       <a:r>
@@ -13698,7 +13698,7 @@
                     <a:bodyPr/>
                     <a:lstStyle/>
                     <a:p>
-                      <a:pPr algn="ctr" indent="0" marL="0">
+                      <a:pPr rtl="1" algn="ctr" indent="0" marL="0">
                         <a:buNone/>
                       </a:pPr>
                       <a:r>
@@ -13972,7 +13972,7 @@
                     <a:bodyPr/>
                     <a:lstStyle/>
                     <a:p>
-                      <a:pPr algn="ctr" indent="0" marL="0">
+                      <a:pPr rtl="1" algn="ctr" indent="0" marL="0">
                         <a:buNone/>
                       </a:pPr>
                       <a:r>
@@ -14246,7 +14246,7 @@
                     <a:bodyPr/>
                     <a:lstStyle/>
                     <a:p>
-                      <a:pPr algn="ctr" indent="0" marL="0">
+                      <a:pPr rtl="1" algn="ctr" indent="0" marL="0">
                         <a:buNone/>
                       </a:pPr>
                       <a:r>
@@ -14520,7 +14520,7 @@
                     <a:bodyPr/>
                     <a:lstStyle/>
                     <a:p>
-                      <a:pPr algn="ctr" indent="0" marL="0">
+                      <a:pPr rtl="1" algn="ctr" indent="0" marL="0">
                         <a:buNone/>
                       </a:pPr>
                       <a:r>
@@ -15853,7 +15853,7 @@
                     <a:bodyPr/>
                     <a:lstStyle/>
                     <a:p>
-                      <a:pPr algn="ctr" indent="0" marL="0">
+                      <a:pPr rtl="1" algn="ctr" indent="0" marL="0">
                         <a:buNone/>
                       </a:pPr>
                       <a:r>
@@ -15921,7 +15921,7 @@
                     <a:bodyPr/>
                     <a:lstStyle/>
                     <a:p>
-                      <a:pPr algn="ctr" indent="0" marL="0">
+                      <a:pPr rtl="1" algn="ctr" indent="0" marL="0">
                         <a:buNone/>
                       </a:pPr>
                       <a:r>
@@ -15989,7 +15989,7 @@
                     <a:bodyPr/>
                     <a:lstStyle/>
                     <a:p>
-                      <a:pPr algn="ctr" indent="0" marL="0">
+                      <a:pPr rtl="1" algn="ctr" indent="0" marL="0">
                         <a:buNone/>
                       </a:pPr>
                       <a:r>
@@ -16127,7 +16127,7 @@
                     <a:bodyPr/>
                     <a:lstStyle/>
                     <a:p>
-                      <a:pPr algn="ctr" indent="0" marL="0">
+                      <a:pPr rtl="1" algn="ctr" indent="0" marL="0">
                         <a:buNone/>
                       </a:pPr>
                       <a:r>
@@ -16333,7 +16333,7 @@
                     <a:bodyPr/>
                     <a:lstStyle/>
                     <a:p>
-                      <a:pPr algn="ctr" indent="0" marL="0">
+                      <a:pPr rtl="1" algn="ctr" indent="0" marL="0">
                         <a:buNone/>
                       </a:pPr>
                       <a:r>
@@ -16539,7 +16539,7 @@
                     <a:bodyPr/>
                     <a:lstStyle/>
                     <a:p>
-                      <a:pPr algn="ctr" indent="0" marL="0">
+                      <a:pPr rtl="1" algn="ctr" indent="0" marL="0">
                         <a:buNone/>
                       </a:pPr>
                       <a:r>
@@ -16745,7 +16745,7 @@
                     <a:bodyPr/>
                     <a:lstStyle/>
                     <a:p>
-                      <a:pPr algn="ctr" indent="0" marL="0">
+                      <a:pPr rtl="1" algn="ctr" indent="0" marL="0">
                         <a:buNone/>
                       </a:pPr>
                       <a:r>
@@ -23031,7 +23031,7 @@
                     <a:bodyPr/>
                     <a:lstStyle/>
                     <a:p>
-                      <a:pPr algn="ctr" indent="0" marL="0">
+                      <a:pPr rtl="1" algn="ctr" indent="0" marL="0">
                         <a:buNone/>
                       </a:pPr>
                       <a:r>
@@ -23099,7 +23099,7 @@
                     <a:bodyPr/>
                     <a:lstStyle/>
                     <a:p>
-                      <a:pPr algn="ctr" indent="0" marL="0">
+                      <a:pPr rtl="1" algn="ctr" indent="0" marL="0">
                         <a:buNone/>
                       </a:pPr>
                       <a:r>
@@ -23237,7 +23237,7 @@
                     <a:bodyPr/>
                     <a:lstStyle/>
                     <a:p>
-                      <a:pPr algn="ctr" indent="0" marL="0">
+                      <a:pPr rtl="1" algn="ctr" indent="0" marL="0">
                         <a:buNone/>
                       </a:pPr>
                       <a:r>
@@ -23375,7 +23375,7 @@
                     <a:bodyPr/>
                     <a:lstStyle/>
                     <a:p>
-                      <a:pPr algn="ctr" indent="0" marL="0">
+                      <a:pPr rtl="1" algn="ctr" indent="0" marL="0">
                         <a:buNone/>
                       </a:pPr>
                       <a:r>
@@ -23513,7 +23513,7 @@
                     <a:bodyPr/>
                     <a:lstStyle/>
                     <a:p>
-                      <a:pPr algn="ctr" indent="0" marL="0">
+                      <a:pPr rtl="1" algn="ctr" indent="0" marL="0">
                         <a:buNone/>
                       </a:pPr>
                       <a:r>
@@ -23651,7 +23651,7 @@
                     <a:bodyPr/>
                     <a:lstStyle/>
                     <a:p>
-                      <a:pPr algn="ctr" indent="0" marL="0">
+                      <a:pPr rtl="1" algn="ctr" indent="0" marL="0">
                         <a:buNone/>
                       </a:pPr>
                       <a:r>
@@ -23789,7 +23789,7 @@
                     <a:bodyPr/>
                     <a:lstStyle/>
                     <a:p>
-                      <a:pPr algn="ctr" indent="0" marL="0">
+                      <a:pPr rtl="1" algn="ctr" indent="0" marL="0">
                         <a:buNone/>
                       </a:pPr>
                       <a:r>
@@ -24308,7 +24308,7 @@
                     <a:bodyPr/>
                     <a:lstStyle/>
                     <a:p>
-                      <a:pPr algn="ctr" indent="0" marL="0">
+                      <a:pPr rtl="1" algn="ctr" indent="0" marL="0">
                         <a:buNone/>
                       </a:pPr>
                       <a:r>
@@ -24376,7 +24376,7 @@
                     <a:bodyPr/>
                     <a:lstStyle/>
                     <a:p>
-                      <a:pPr algn="ctr" indent="0" marL="0">
+                      <a:pPr rtl="1" algn="ctr" indent="0" marL="0">
                         <a:buNone/>
                       </a:pPr>
                       <a:r>
@@ -24444,7 +24444,7 @@
                     <a:bodyPr/>
                     <a:lstStyle/>
                     <a:p>
-                      <a:pPr algn="ctr" indent="0" marL="0">
+                      <a:pPr rtl="1" algn="ctr" indent="0" marL="0">
                         <a:buNone/>
                       </a:pPr>
                       <a:r>
@@ -24650,7 +24650,7 @@
                     <a:bodyPr/>
                     <a:lstStyle/>
                     <a:p>
-                      <a:pPr algn="ctr" indent="0" marL="0">
+                      <a:pPr rtl="1" algn="ctr" indent="0" marL="0">
                         <a:buNone/>
                       </a:pPr>
                       <a:r>
@@ -25680,7 +25680,7 @@
                     <a:bodyPr/>
                     <a:lstStyle/>
                     <a:p>
-                      <a:pPr algn="ctr" indent="0" marL="0">
+                      <a:pPr rtl="1" algn="ctr" indent="0" marL="0">
                         <a:buNone/>
                       </a:pPr>
                       <a:r>
@@ -26944,7 +26944,7 @@
                     <a:bodyPr/>
                     <a:lstStyle/>
                     <a:p>
-                      <a:pPr algn="ctr" indent="0" marL="0">
+                      <a:pPr rtl="1" algn="ctr" indent="0" marL="0">
                         <a:buNone/>
                       </a:pPr>
                       <a:r>
@@ -27012,7 +27012,7 @@
                     <a:bodyPr/>
                     <a:lstStyle/>
                     <a:p>
-                      <a:pPr algn="ctr" indent="0" marL="0">
+                      <a:pPr rtl="1" algn="ctr" indent="0" marL="0">
                         <a:buNone/>
                       </a:pPr>
                       <a:r>
@@ -27150,7 +27150,7 @@
                     <a:bodyPr/>
                     <a:lstStyle/>
                     <a:p>
-                      <a:pPr algn="ctr" indent="0" marL="0">
+                      <a:pPr rtl="1" algn="ctr" indent="0" marL="0">
                         <a:buNone/>
                       </a:pPr>
                       <a:r>
@@ -27288,7 +27288,7 @@
                     <a:bodyPr/>
                     <a:lstStyle/>
                     <a:p>
-                      <a:pPr algn="ctr" indent="0" marL="0">
+                      <a:pPr rtl="1" algn="ctr" indent="0" marL="0">
                         <a:buNone/>
                       </a:pPr>
                       <a:r>
@@ -27426,7 +27426,7 @@
                     <a:bodyPr/>
                     <a:lstStyle/>
                     <a:p>
-                      <a:pPr algn="ctr" indent="0" marL="0">
+                      <a:pPr rtl="1" algn="ctr" indent="0" marL="0">
                         <a:buNone/>
                       </a:pPr>
                       <a:r>
@@ -27564,7 +27564,7 @@
                     <a:bodyPr/>
                     <a:lstStyle/>
                     <a:p>
-                      <a:pPr algn="ctr" indent="0" marL="0">
+                      <a:pPr rtl="1" algn="ctr" indent="0" marL="0">
                         <a:buNone/>
                       </a:pPr>
                       <a:r>
@@ -27702,7 +27702,7 @@
                     <a:bodyPr/>
                     <a:lstStyle/>
                     <a:p>
-                      <a:pPr algn="ctr" indent="0" marL="0">
+                      <a:pPr rtl="1" algn="ctr" indent="0" marL="0">
                         <a:buNone/>
                       </a:pPr>
                       <a:r>
@@ -27840,7 +27840,7 @@
                     <a:bodyPr/>
                     <a:lstStyle/>
                     <a:p>
-                      <a:pPr algn="ctr" indent="0" marL="0">
+                      <a:pPr rtl="1" algn="ctr" indent="0" marL="0">
                         <a:buNone/>
                       </a:pPr>
                       <a:r>
@@ -28691,7 +28691,7 @@
                     <a:bodyPr/>
                     <a:lstStyle/>
                     <a:p>
-                      <a:pPr algn="ctr" indent="0" marL="0">
+                      <a:pPr rtl="1" algn="ctr" indent="0" marL="0">
                         <a:buNone/>
                       </a:pPr>
                       <a:r>
@@ -28759,7 +28759,7 @@
                     <a:bodyPr/>
                     <a:lstStyle/>
                     <a:p>
-                      <a:pPr algn="ctr" indent="0" marL="0">
+                      <a:pPr rtl="1" algn="ctr" indent="0" marL="0">
                         <a:buNone/>
                       </a:pPr>
                       <a:r>
@@ -28897,7 +28897,7 @@
                     <a:bodyPr/>
                     <a:lstStyle/>
                     <a:p>
-                      <a:pPr algn="ctr" indent="0" marL="0">
+                      <a:pPr rtl="1" algn="ctr" indent="0" marL="0">
                         <a:buNone/>
                       </a:pPr>
                       <a:r>
@@ -29035,7 +29035,7 @@
                     <a:bodyPr/>
                     <a:lstStyle/>
                     <a:p>
-                      <a:pPr algn="ctr" indent="0" marL="0">
+                      <a:pPr rtl="1" algn="ctr" indent="0" marL="0">
                         <a:buNone/>
                       </a:pPr>
                       <a:r>
@@ -29173,7 +29173,7 @@
                     <a:bodyPr/>
                     <a:lstStyle/>
                     <a:p>
-                      <a:pPr algn="ctr" indent="0" marL="0">
+                      <a:pPr rtl="1" algn="ctr" indent="0" marL="0">
                         <a:buNone/>
                       </a:pPr>
                       <a:r>
@@ -29311,7 +29311,7 @@
                     <a:bodyPr/>
                     <a:lstStyle/>
                     <a:p>
-                      <a:pPr algn="ctr" indent="0" marL="0">
+                      <a:pPr rtl="1" algn="ctr" indent="0" marL="0">
                         <a:buNone/>
                       </a:pPr>
                       <a:r>
@@ -29449,7 +29449,7 @@
                     <a:bodyPr/>
                     <a:lstStyle/>
                     <a:p>
-                      <a:pPr algn="ctr" indent="0" marL="0">
+                      <a:pPr rtl="1" algn="ctr" indent="0" marL="0">
                         <a:buNone/>
                       </a:pPr>
                       <a:r>
@@ -29587,7 +29587,7 @@
                     <a:bodyPr/>
                     <a:lstStyle/>
                     <a:p>
-                      <a:pPr algn="ctr" indent="0" marL="0">
+                      <a:pPr rtl="1" algn="ctr" indent="0" marL="0">
                         <a:buNone/>
                       </a:pPr>
                       <a:r>
@@ -29725,7 +29725,7 @@
                     <a:bodyPr/>
                     <a:lstStyle/>
                     <a:p>
-                      <a:pPr algn="ctr" indent="0" marL="0">
+                      <a:pPr rtl="1" algn="ctr" indent="0" marL="0">
                         <a:buNone/>
                       </a:pPr>
                       <a:r>
